--- a/exports/pptx/lessons/senior-module-02-panchabhuta/day-01-hook.pptx
+++ b/exports/pptx/lessons/senior-module-02-panchabhuta/day-01-hook.pptx
@@ -3066,8 +3066,8 @@
         </p:nvSpPr>
         <p:spPr>
           <a:xfrm>
-            <a:off x="634901" y="2450753"/>
-            <a:ext cx="8102798" cy="693241"/>
+            <a:off x="406301" y="1254323"/>
+            <a:ext cx="8498026" cy="213271"/>
           </a:xfrm>
           <a:prstGeom prst="rect">
             <a:avLst/>
@@ -3079,51 +3079,13 @@
           <a:bodyPr wrap="square" lIns="0" tIns="0" rIns="0" bIns="0" rtlCol="0" anchor="t"/>
           <a:lstStyle/>
           <a:p>
-            <a:pPr algn="l" marL="342900" indent="-342900">
-              <a:lnSpc>
-                <a:spcPts val="1620"/>
-              </a:lnSpc>
-              <a:spcAft>
-                <a:spcPts val="300"/>
-              </a:spcAft>
-              <a:buSzPct val="100000"/>
-              <a:buChar char="•"/>
-            </a:pPr>
-            <a:r>
-              <a:rPr lang="en-US" sz="1200" b="1" dirty="0">
-                <a:solidFill>
-                  <a:srgbClr val="1A1A1A"/>
-                </a:solidFill>
-                <a:latin typeface="Georgia" pitchFamily="34" charset="0"/>
-                <a:ea typeface="Georgia" pitchFamily="34" charset="-122"/>
-                <a:cs typeface="Georgia" pitchFamily="34" charset="-120"/>
-              </a:rPr>
-              <a:t>The persistent question:</a:t>
-            </a:r>
-            <a:pPr algn="l" indent="0" marL="0">
-              <a:lnSpc>
-                <a:spcPts val="1620"/>
-              </a:lnSpc>
-              <a:spcAft>
-                <a:spcPts val="300"/>
-              </a:spcAft>
-              <a:buNone/>
-            </a:pPr>
-            <a:r>
-              <a:rPr lang="en-US" sz="1200" dirty="0">
-                <a:solidFill>
-                  <a:srgbClr val="1A1A1A"/>
-                </a:solidFill>
-                <a:latin typeface="Georgia" pitchFamily="34" charset="0"/>
-                <a:ea typeface="Georgia" pitchFamily="34" charset="-122"/>
-                <a:cs typeface="Georgia" pitchFamily="34" charset="-120"/>
-              </a:rPr>
-              <a:t> </a:t>
-            </a:r>
-            <a:pPr algn="l" indent="0" marL="0">
-              <a:lnSpc>
-                <a:spcPts val="1620"/>
-              </a:lnSpc>
+            <a:pPr algn="l" indent="0" marL="0">
+              <a:lnSpc>
+                <a:spcPts val="1680"/>
+              </a:lnSpc>
+              <a:spcBef>
+                <a:spcPts val="300"/>
+              </a:spcBef>
               <a:spcAft>
                 <a:spcPts val="300"/>
               </a:spcAft>
@@ -3138,27 +3100,7 @@
                 <a:ea typeface="Georgia" pitchFamily="34" charset="-122"/>
                 <a:cs typeface="Georgia" pitchFamily="34" charset="-120"/>
               </a:rPr>
-              <a:t>"What categories of stuff (and not-stuff) does the world come in?"</a:t>
-            </a:r>
-            <a:pPr algn="l" indent="0" marL="0">
-              <a:lnSpc>
-                <a:spcPts val="1620"/>
-              </a:lnSpc>
-              <a:spcAft>
-                <a:spcPts val="300"/>
-              </a:spcAft>
-              <a:buNone/>
-            </a:pPr>
-            <a:r>
-              <a:rPr lang="en-US" sz="1200" dirty="0">
-                <a:solidFill>
-                  <a:srgbClr val="1A1A1A"/>
-                </a:solidFill>
-                <a:latin typeface="Georgia" pitchFamily="34" charset="0"/>
-                <a:ea typeface="Georgia" pitchFamily="34" charset="-122"/>
-                <a:cs typeface="Georgia" pitchFamily="34" charset="-120"/>
-              </a:rPr>
-              <a:t> Every culture's natural philosophers tried to answer this. The answers differ because the methods differ and the questions are framed differently.</a:t>
+              <a:t>Each row: Framework · Approximate date · Categories.</a:t>
             </a:r>
             <a:endParaRPr lang="en-US" sz="1200" dirty="0"/>
           </a:p>
@@ -3172,8 +3114,8 @@
         </p:nvSpPr>
         <p:spPr>
           <a:xfrm>
-            <a:off x="634901" y="3245495"/>
-            <a:ext cx="8102798" cy="281880"/>
+            <a:off x="634901" y="1556445"/>
+            <a:ext cx="8102798" cy="769441"/>
           </a:xfrm>
           <a:prstGeom prst="rect">
             <a:avLst/>
@@ -3204,7 +3146,7 @@
                 <a:ea typeface="Georgia" pitchFamily="34" charset="-122"/>
                 <a:cs typeface="Georgia" pitchFamily="34" charset="-120"/>
               </a:rPr>
-              <a:t>Today's anchor verse — SB 2.10.3.</a:t>
+              <a:t>Greek (Empedocles, Aristotle)</a:t>
             </a:r>
             <a:pPr algn="l" indent="0" marL="0">
               <a:lnSpc>
@@ -3224,7 +3166,95 @@
                 <a:ea typeface="Georgia" pitchFamily="34" charset="-122"/>
                 <a:cs typeface="Georgia" pitchFamily="34" charset="-120"/>
               </a:rPr>
-              <a:t> Read in IAST. Then translation:</a:t>
+              <a:t> — 5th c. BCE → 4th c. BCE · 4 + 1 (quintessence)</a:t>
+            </a:r>
+            <a:endParaRPr lang="en-US" sz="1200" dirty="0"/>
+          </a:p>
+          <a:p>
+            <a:pPr algn="l" marL="342900" indent="-342900">
+              <a:lnSpc>
+                <a:spcPts val="1620"/>
+              </a:lnSpc>
+              <a:spcAft>
+                <a:spcPts val="300"/>
+              </a:spcAft>
+              <a:buSzPct val="100000"/>
+              <a:buChar char="•"/>
+            </a:pPr>
+            <a:r>
+              <a:rPr lang="en-US" sz="1200" b="1" dirty="0">
+                <a:solidFill>
+                  <a:srgbClr val="1A1A1A"/>
+                </a:solidFill>
+                <a:latin typeface="Georgia" pitchFamily="34" charset="0"/>
+                <a:ea typeface="Georgia" pitchFamily="34" charset="-122"/>
+                <a:cs typeface="Georgia" pitchFamily="34" charset="-120"/>
+              </a:rPr>
+              <a:t>Sāṅkhya (India)</a:t>
+            </a:r>
+            <a:pPr algn="l" indent="0" marL="0">
+              <a:lnSpc>
+                <a:spcPts val="1620"/>
+              </a:lnSpc>
+              <a:spcAft>
+                <a:spcPts val="300"/>
+              </a:spcAft>
+              <a:buNone/>
+            </a:pPr>
+            <a:r>
+              <a:rPr lang="en-US" sz="1200" dirty="0">
+                <a:solidFill>
+                  <a:srgbClr val="1A1A1A"/>
+                </a:solidFill>
+                <a:latin typeface="Georgia" pitchFamily="34" charset="0"/>
+                <a:ea typeface="Georgia" pitchFamily="34" charset="-122"/>
+                <a:cs typeface="Georgia" pitchFamily="34" charset="-120"/>
+              </a:rPr>
+              <a:t> — likely pre-5th c. BCE, codified c. 4th c. CE · 25 tattvas (5 are bhūtas)</a:t>
+            </a:r>
+            <a:endParaRPr lang="en-US" sz="1200" dirty="0"/>
+          </a:p>
+          <a:p>
+            <a:pPr algn="l" marL="342900" indent="-342900">
+              <a:lnSpc>
+                <a:spcPts val="1620"/>
+              </a:lnSpc>
+              <a:spcAft>
+                <a:spcPts val="300"/>
+              </a:spcAft>
+              <a:buSzPct val="100000"/>
+              <a:buChar char="•"/>
+            </a:pPr>
+            <a:r>
+              <a:rPr lang="en-US" sz="1200" b="1" dirty="0">
+                <a:solidFill>
+                  <a:srgbClr val="1A1A1A"/>
+                </a:solidFill>
+                <a:latin typeface="Georgia" pitchFamily="34" charset="0"/>
+                <a:ea typeface="Georgia" pitchFamily="34" charset="-122"/>
+                <a:cs typeface="Georgia" pitchFamily="34" charset="-120"/>
+              </a:rPr>
+              <a:t>Modern periodic table</a:t>
+            </a:r>
+            <a:pPr algn="l" indent="0" marL="0">
+              <a:lnSpc>
+                <a:spcPts val="1620"/>
+              </a:lnSpc>
+              <a:spcAft>
+                <a:spcPts val="300"/>
+              </a:spcAft>
+              <a:buNone/>
+            </a:pPr>
+            <a:r>
+              <a:rPr lang="en-US" sz="1200" dirty="0">
+                <a:solidFill>
+                  <a:srgbClr val="1A1A1A"/>
+                </a:solidFill>
+                <a:latin typeface="Georgia" pitchFamily="34" charset="0"/>
+                <a:ea typeface="Georgia" pitchFamily="34" charset="-122"/>
+                <a:cs typeface="Georgia" pitchFamily="34" charset="-120"/>
+              </a:rPr>
+              <a:t> — 1869 (Mendeleev) → present · 118+ elements</a:t>
             </a:r>
             <a:endParaRPr lang="en-US" sz="1200" dirty="0"/>
           </a:p>
@@ -3238,8 +3268,8 @@
         </p:nvSpPr>
         <p:spPr>
           <a:xfrm>
-            <a:off x="406301" y="3616226"/>
-            <a:ext cx="8498026" cy="426541"/>
+            <a:off x="634901" y="2427387"/>
+            <a:ext cx="8102798" cy="693241"/>
           </a:xfrm>
           <a:prstGeom prst="rect">
             <a:avLst/>
@@ -3251,13 +3281,31 @@
           <a:bodyPr wrap="square" lIns="0" tIns="0" rIns="0" bIns="0" rtlCol="0" anchor="t"/>
           <a:lstStyle/>
           <a:p>
-            <a:pPr algn="l" indent="0" marL="0">
-              <a:lnSpc>
-                <a:spcPts val="1680"/>
-              </a:lnSpc>
-              <a:spcBef>
-                <a:spcPts val="300"/>
-              </a:spcBef>
+            <a:pPr algn="l" marL="342900" indent="-342900">
+              <a:lnSpc>
+                <a:spcPts val="1620"/>
+              </a:lnSpc>
+              <a:spcAft>
+                <a:spcPts val="300"/>
+              </a:spcAft>
+              <a:buSzPct val="100000"/>
+              <a:buChar char="•"/>
+            </a:pPr>
+            <a:r>
+              <a:rPr lang="en-US" sz="1200" b="1" dirty="0">
+                <a:solidFill>
+                  <a:srgbClr val="1A1A1A"/>
+                </a:solidFill>
+                <a:latin typeface="Georgia" pitchFamily="34" charset="0"/>
+                <a:ea typeface="Georgia" pitchFamily="34" charset="-122"/>
+                <a:cs typeface="Georgia" pitchFamily="34" charset="-120"/>
+              </a:rPr>
+              <a:t>The persistent question:</a:t>
+            </a:r>
+            <a:pPr algn="l" indent="0" marL="0">
+              <a:lnSpc>
+                <a:spcPts val="1620"/>
+              </a:lnSpc>
               <a:spcAft>
                 <a:spcPts val="300"/>
               </a:spcAft>
@@ -3272,15 +3320,12 @@
                 <a:ea typeface="Georgia" pitchFamily="34" charset="-122"/>
                 <a:cs typeface="Georgia" pitchFamily="34" charset="-120"/>
               </a:rPr>
-              <a:t>&gt; "</a:t>
-            </a:r>
-            <a:pPr algn="l" indent="0" marL="0">
-              <a:lnSpc>
-                <a:spcPts val="1680"/>
-              </a:lnSpc>
-              <a:spcBef>
-                <a:spcPts val="300"/>
-              </a:spcBef>
+              <a:t> </a:t>
+            </a:r>
+            <a:pPr algn="l" indent="0" marL="0">
+              <a:lnSpc>
+                <a:spcPts val="1620"/>
+              </a:lnSpc>
               <a:spcAft>
                 <a:spcPts val="300"/>
               </a:spcAft>
@@ -3295,15 +3340,12 @@
                 <a:ea typeface="Georgia" pitchFamily="34" charset="-122"/>
                 <a:cs typeface="Georgia" pitchFamily="34" charset="-120"/>
               </a:rPr>
-              <a:t>bhūta-mātrendṛya-dhiyāṁ janma sarga udāhṛtaḥ ...</a:t>
-            </a:r>
-            <a:pPr algn="l" indent="0" marL="0">
-              <a:lnSpc>
-                <a:spcPts val="1680"/>
-              </a:lnSpc>
-              <a:spcBef>
-                <a:spcPts val="300"/>
-              </a:spcBef>
+              <a:t>"What categories of stuff (and not-stuff) does the world come in?"</a:t>
+            </a:r>
+            <a:pPr algn="l" indent="0" marL="0">
+              <a:lnSpc>
+                <a:spcPts val="1620"/>
+              </a:lnSpc>
               <a:spcAft>
                 <a:spcPts val="300"/>
               </a:spcAft>
@@ -3318,53 +3360,7 @@
                 <a:ea typeface="Georgia" pitchFamily="34" charset="-122"/>
                 <a:cs typeface="Georgia" pitchFamily="34" charset="-120"/>
               </a:rPr>
-              <a:t>" &gt; "The manifestation of the gross elements, the senses, and the intellect is called creation (</a:t>
-            </a:r>
-            <a:pPr algn="l" indent="0" marL="0">
-              <a:lnSpc>
-                <a:spcPts val="1680"/>
-              </a:lnSpc>
-              <a:spcBef>
-                <a:spcPts val="300"/>
-              </a:spcBef>
-              <a:spcAft>
-                <a:spcPts val="300"/>
-              </a:spcAft>
-              <a:buNone/>
-            </a:pPr>
-            <a:r>
-              <a:rPr lang="en-US" sz="1200" i="1" dirty="0">
-                <a:solidFill>
-                  <a:srgbClr val="1A1A1A"/>
-                </a:solidFill>
-                <a:latin typeface="Georgia" pitchFamily="34" charset="0"/>
-                <a:ea typeface="Georgia" pitchFamily="34" charset="-122"/>
-                <a:cs typeface="Georgia" pitchFamily="34" charset="-120"/>
-              </a:rPr>
-              <a:t>sarga</a:t>
-            </a:r>
-            <a:pPr algn="l" indent="0" marL="0">
-              <a:lnSpc>
-                <a:spcPts val="1680"/>
-              </a:lnSpc>
-              <a:spcBef>
-                <a:spcPts val="300"/>
-              </a:spcBef>
-              <a:spcAft>
-                <a:spcPts val="300"/>
-              </a:spcAft>
-              <a:buNone/>
-            </a:pPr>
-            <a:r>
-              <a:rPr lang="en-US" sz="1200" dirty="0">
-                <a:solidFill>
-                  <a:srgbClr val="1A1A1A"/>
-                </a:solidFill>
-                <a:latin typeface="Georgia" pitchFamily="34" charset="0"/>
-                <a:ea typeface="Georgia" pitchFamily="34" charset="-122"/>
-                <a:cs typeface="Georgia" pitchFamily="34" charset="-120"/>
-              </a:rPr>
-              <a:t>)."</a:t>
+              <a:t> Every culture's natural philosophers tried to answer this. The answers differ because the methods differ and the questions are framed differently.</a:t>
             </a:r>
             <a:endParaRPr lang="en-US" sz="1200" dirty="0"/>
           </a:p>
@@ -3378,8 +3374,8 @@
         </p:nvSpPr>
         <p:spPr>
           <a:xfrm>
-            <a:off x="406301" y="4118967"/>
-            <a:ext cx="8498026" cy="639812"/>
+            <a:off x="634901" y="3222129"/>
+            <a:ext cx="8102798" cy="281880"/>
           </a:xfrm>
           <a:prstGeom prst="rect">
             <a:avLst/>
@@ -3391,17 +3387,15 @@
           <a:bodyPr wrap="square" lIns="0" tIns="0" rIns="0" bIns="0" rtlCol="0" anchor="t"/>
           <a:lstStyle/>
           <a:p>
-            <a:pPr algn="l" indent="0" marL="0">
-              <a:lnSpc>
-                <a:spcPts val="1680"/>
-              </a:lnSpc>
-              <a:spcBef>
-                <a:spcPts val="300"/>
-              </a:spcBef>
-              <a:spcAft>
-                <a:spcPts val="300"/>
-              </a:spcAft>
-              <a:buNone/>
+            <a:pPr algn="l" marL="342900" indent="-342900">
+              <a:lnSpc>
+                <a:spcPts val="1620"/>
+              </a:lnSpc>
+              <a:spcAft>
+                <a:spcPts val="300"/>
+              </a:spcAft>
+              <a:buSzPct val="100000"/>
+              <a:buChar char="•"/>
             </a:pPr>
             <a:r>
               <a:rPr lang="en-US" sz="1200" b="1" dirty="0">
@@ -3412,15 +3406,12 @@
                 <a:ea typeface="Georgia" pitchFamily="34" charset="-122"/>
                 <a:cs typeface="Georgia" pitchFamily="34" charset="-120"/>
               </a:rPr>
-              <a:t>Note the move:</a:t>
-            </a:r>
-            <a:pPr algn="l" indent="0" marL="0">
-              <a:lnSpc>
-                <a:spcPts val="1680"/>
-              </a:lnSpc>
-              <a:spcBef>
-                <a:spcPts val="300"/>
-              </a:spcBef>
+              <a:t>Today's anchor verse — SB 2.10.3.</a:t>
+            </a:r>
+            <a:pPr algn="l" indent="0" marL="0">
+              <a:lnSpc>
+                <a:spcPts val="1620"/>
+              </a:lnSpc>
               <a:spcAft>
                 <a:spcPts val="300"/>
               </a:spcAft>
@@ -3435,53 +3426,7 @@
                 <a:ea typeface="Georgia" pitchFamily="34" charset="-122"/>
                 <a:cs typeface="Georgia" pitchFamily="34" charset="-120"/>
               </a:rPr>
-              <a:t> the Sāṅkhya verse names the bhūtas (elements), the indriyas (senses), and the dhī (intellect) as products of a single creation event. Modern science talks about atoms; Sāṅkhya talks about a unified scheme that includes the </a:t>
-            </a:r>
-            <a:pPr algn="l" indent="0" marL="0">
-              <a:lnSpc>
-                <a:spcPts val="1680"/>
-              </a:lnSpc>
-              <a:spcBef>
-                <a:spcPts val="300"/>
-              </a:spcBef>
-              <a:spcAft>
-                <a:spcPts val="300"/>
-              </a:spcAft>
-              <a:buNone/>
-            </a:pPr>
-            <a:r>
-              <a:rPr lang="en-US" sz="1200" i="1" dirty="0">
-                <a:solidFill>
-                  <a:srgbClr val="1A1A1A"/>
-                </a:solidFill>
-                <a:latin typeface="Georgia" pitchFamily="34" charset="0"/>
-                <a:ea typeface="Georgia" pitchFamily="34" charset="-122"/>
-                <a:cs typeface="Georgia" pitchFamily="34" charset="-120"/>
-              </a:rPr>
-              <a:t>perceiver</a:t>
-            </a:r>
-            <a:pPr algn="l" indent="0" marL="0">
-              <a:lnSpc>
-                <a:spcPts val="1680"/>
-              </a:lnSpc>
-              <a:spcBef>
-                <a:spcPts val="300"/>
-              </a:spcBef>
-              <a:spcAft>
-                <a:spcPts val="300"/>
-              </a:spcAft>
-              <a:buNone/>
-            </a:pPr>
-            <a:r>
-              <a:rPr lang="en-US" sz="1200" dirty="0">
-                <a:solidFill>
-                  <a:srgbClr val="1A1A1A"/>
-                </a:solidFill>
-                <a:latin typeface="Georgia" pitchFamily="34" charset="0"/>
-                <a:ea typeface="Georgia" pitchFamily="34" charset="-122"/>
-                <a:cs typeface="Georgia" pitchFamily="34" charset="-120"/>
-              </a:rPr>
-              <a:t>. This is a real structural difference, not just terminology.</a:t>
+              <a:t> Read in IAST. Then translation:</a:t>
             </a:r>
             <a:endParaRPr lang="en-US" sz="1200" dirty="0"/>
           </a:p>
@@ -3495,7 +3440,264 @@
         </p:nvSpPr>
         <p:spPr>
           <a:xfrm>
-            <a:off x="406301" y="4911179"/>
+            <a:off x="406301" y="3592860"/>
+            <a:ext cx="8498026" cy="426541"/>
+          </a:xfrm>
+          <a:prstGeom prst="rect">
+            <a:avLst/>
+          </a:prstGeom>
+          <a:noFill/>
+          <a:ln/>
+        </p:spPr>
+        <p:txBody>
+          <a:bodyPr wrap="square" lIns="0" tIns="0" rIns="0" bIns="0" rtlCol="0" anchor="t"/>
+          <a:lstStyle/>
+          <a:p>
+            <a:pPr algn="l" indent="0" marL="0">
+              <a:lnSpc>
+                <a:spcPts val="1680"/>
+              </a:lnSpc>
+              <a:spcBef>
+                <a:spcPts val="300"/>
+              </a:spcBef>
+              <a:spcAft>
+                <a:spcPts val="300"/>
+              </a:spcAft>
+              <a:buNone/>
+            </a:pPr>
+            <a:r>
+              <a:rPr lang="en-US" sz="1200" dirty="0">
+                <a:solidFill>
+                  <a:srgbClr val="1A1A1A"/>
+                </a:solidFill>
+                <a:latin typeface="Georgia" pitchFamily="34" charset="0"/>
+                <a:ea typeface="Georgia" pitchFamily="34" charset="-122"/>
+                <a:cs typeface="Georgia" pitchFamily="34" charset="-120"/>
+              </a:rPr>
+              <a:t>&gt; "</a:t>
+            </a:r>
+            <a:pPr algn="l" indent="0" marL="0">
+              <a:lnSpc>
+                <a:spcPts val="1680"/>
+              </a:lnSpc>
+              <a:spcBef>
+                <a:spcPts val="300"/>
+              </a:spcBef>
+              <a:spcAft>
+                <a:spcPts val="300"/>
+              </a:spcAft>
+              <a:buNone/>
+            </a:pPr>
+            <a:r>
+              <a:rPr lang="en-US" sz="1200" i="1" dirty="0">
+                <a:solidFill>
+                  <a:srgbClr val="1A1A1A"/>
+                </a:solidFill>
+                <a:latin typeface="Georgia" pitchFamily="34" charset="0"/>
+                <a:ea typeface="Georgia" pitchFamily="34" charset="-122"/>
+                <a:cs typeface="Georgia" pitchFamily="34" charset="-120"/>
+              </a:rPr>
+              <a:t>bhūta-mātrendṛya-dhiyāṁ janma sarga udāhṛtaḥ ...</a:t>
+            </a:r>
+            <a:pPr algn="l" indent="0" marL="0">
+              <a:lnSpc>
+                <a:spcPts val="1680"/>
+              </a:lnSpc>
+              <a:spcBef>
+                <a:spcPts val="300"/>
+              </a:spcBef>
+              <a:spcAft>
+                <a:spcPts val="300"/>
+              </a:spcAft>
+              <a:buNone/>
+            </a:pPr>
+            <a:r>
+              <a:rPr lang="en-US" sz="1200" dirty="0">
+                <a:solidFill>
+                  <a:srgbClr val="1A1A1A"/>
+                </a:solidFill>
+                <a:latin typeface="Georgia" pitchFamily="34" charset="0"/>
+                <a:ea typeface="Georgia" pitchFamily="34" charset="-122"/>
+                <a:cs typeface="Georgia" pitchFamily="34" charset="-120"/>
+              </a:rPr>
+              <a:t>" &gt; "The manifestation of the gross elements, the senses, and the intellect is called creation (</a:t>
+            </a:r>
+            <a:pPr algn="l" indent="0" marL="0">
+              <a:lnSpc>
+                <a:spcPts val="1680"/>
+              </a:lnSpc>
+              <a:spcBef>
+                <a:spcPts val="300"/>
+              </a:spcBef>
+              <a:spcAft>
+                <a:spcPts val="300"/>
+              </a:spcAft>
+              <a:buNone/>
+            </a:pPr>
+            <a:r>
+              <a:rPr lang="en-US" sz="1200" i="1" dirty="0">
+                <a:solidFill>
+                  <a:srgbClr val="1A1A1A"/>
+                </a:solidFill>
+                <a:latin typeface="Georgia" pitchFamily="34" charset="0"/>
+                <a:ea typeface="Georgia" pitchFamily="34" charset="-122"/>
+                <a:cs typeface="Georgia" pitchFamily="34" charset="-120"/>
+              </a:rPr>
+              <a:t>sarga</a:t>
+            </a:r>
+            <a:pPr algn="l" indent="0" marL="0">
+              <a:lnSpc>
+                <a:spcPts val="1680"/>
+              </a:lnSpc>
+              <a:spcBef>
+                <a:spcPts val="300"/>
+              </a:spcBef>
+              <a:spcAft>
+                <a:spcPts val="300"/>
+              </a:spcAft>
+              <a:buNone/>
+            </a:pPr>
+            <a:r>
+              <a:rPr lang="en-US" sz="1200" dirty="0">
+                <a:solidFill>
+                  <a:srgbClr val="1A1A1A"/>
+                </a:solidFill>
+                <a:latin typeface="Georgia" pitchFamily="34" charset="0"/>
+                <a:ea typeface="Georgia" pitchFamily="34" charset="-122"/>
+                <a:cs typeface="Georgia" pitchFamily="34" charset="-120"/>
+              </a:rPr>
+              <a:t>)."</a:t>
+            </a:r>
+            <a:endParaRPr lang="en-US" sz="1200" dirty="0"/>
+          </a:p>
+        </p:txBody>
+      </p:sp>
+      <p:sp>
+        <p:nvSpPr>
+          <p:cNvPr id="10" name="Text 8"/>
+          <p:cNvSpPr/>
+          <p:nvPr/>
+        </p:nvSpPr>
+        <p:spPr>
+          <a:xfrm>
+            <a:off x="406301" y="4095601"/>
+            <a:ext cx="8498026" cy="639812"/>
+          </a:xfrm>
+          <a:prstGeom prst="rect">
+            <a:avLst/>
+          </a:prstGeom>
+          <a:noFill/>
+          <a:ln/>
+        </p:spPr>
+        <p:txBody>
+          <a:bodyPr wrap="square" lIns="0" tIns="0" rIns="0" bIns="0" rtlCol="0" anchor="t"/>
+          <a:lstStyle/>
+          <a:p>
+            <a:pPr algn="l" indent="0" marL="0">
+              <a:lnSpc>
+                <a:spcPts val="1680"/>
+              </a:lnSpc>
+              <a:spcBef>
+                <a:spcPts val="300"/>
+              </a:spcBef>
+              <a:spcAft>
+                <a:spcPts val="300"/>
+              </a:spcAft>
+              <a:buNone/>
+            </a:pPr>
+            <a:r>
+              <a:rPr lang="en-US" sz="1200" b="1" dirty="0">
+                <a:solidFill>
+                  <a:srgbClr val="1A1A1A"/>
+                </a:solidFill>
+                <a:latin typeface="Georgia" pitchFamily="34" charset="0"/>
+                <a:ea typeface="Georgia" pitchFamily="34" charset="-122"/>
+                <a:cs typeface="Georgia" pitchFamily="34" charset="-120"/>
+              </a:rPr>
+              <a:t>Note the move:</a:t>
+            </a:r>
+            <a:pPr algn="l" indent="0" marL="0">
+              <a:lnSpc>
+                <a:spcPts val="1680"/>
+              </a:lnSpc>
+              <a:spcBef>
+                <a:spcPts val="300"/>
+              </a:spcBef>
+              <a:spcAft>
+                <a:spcPts val="300"/>
+              </a:spcAft>
+              <a:buNone/>
+            </a:pPr>
+            <a:r>
+              <a:rPr lang="en-US" sz="1200" dirty="0">
+                <a:solidFill>
+                  <a:srgbClr val="1A1A1A"/>
+                </a:solidFill>
+                <a:latin typeface="Georgia" pitchFamily="34" charset="0"/>
+                <a:ea typeface="Georgia" pitchFamily="34" charset="-122"/>
+                <a:cs typeface="Georgia" pitchFamily="34" charset="-120"/>
+              </a:rPr>
+              <a:t> the Sāṅkhya verse names the bhūtas (elements), the indriyas (senses), and the dhī (intellect) as products of a single creation event. Modern science talks about atoms; Sāṅkhya talks about a unified scheme that includes the </a:t>
+            </a:r>
+            <a:pPr algn="l" indent="0" marL="0">
+              <a:lnSpc>
+                <a:spcPts val="1680"/>
+              </a:lnSpc>
+              <a:spcBef>
+                <a:spcPts val="300"/>
+              </a:spcBef>
+              <a:spcAft>
+                <a:spcPts val="300"/>
+              </a:spcAft>
+              <a:buNone/>
+            </a:pPr>
+            <a:r>
+              <a:rPr lang="en-US" sz="1200" i="1" dirty="0">
+                <a:solidFill>
+                  <a:srgbClr val="1A1A1A"/>
+                </a:solidFill>
+                <a:latin typeface="Georgia" pitchFamily="34" charset="0"/>
+                <a:ea typeface="Georgia" pitchFamily="34" charset="-122"/>
+                <a:cs typeface="Georgia" pitchFamily="34" charset="-120"/>
+              </a:rPr>
+              <a:t>perceiver</a:t>
+            </a:r>
+            <a:pPr algn="l" indent="0" marL="0">
+              <a:lnSpc>
+                <a:spcPts val="1680"/>
+              </a:lnSpc>
+              <a:spcBef>
+                <a:spcPts val="300"/>
+              </a:spcBef>
+              <a:spcAft>
+                <a:spcPts val="300"/>
+              </a:spcAft>
+              <a:buNone/>
+            </a:pPr>
+            <a:r>
+              <a:rPr lang="en-US" sz="1200" dirty="0">
+                <a:solidFill>
+                  <a:srgbClr val="1A1A1A"/>
+                </a:solidFill>
+                <a:latin typeface="Georgia" pitchFamily="34" charset="0"/>
+                <a:ea typeface="Georgia" pitchFamily="34" charset="-122"/>
+                <a:cs typeface="Georgia" pitchFamily="34" charset="-120"/>
+              </a:rPr>
+              <a:t>. This is a real structural difference, not just terminology.</a:t>
+            </a:r>
+            <a:endParaRPr lang="en-US" sz="1200" dirty="0"/>
+          </a:p>
+        </p:txBody>
+      </p:sp>
+      <p:sp>
+        <p:nvSpPr>
+          <p:cNvPr id="11" name="Text 9"/>
+          <p:cNvSpPr/>
+          <p:nvPr/>
+        </p:nvSpPr>
+        <p:spPr>
+          <a:xfrm>
+            <a:off x="406301" y="4887813"/>
             <a:ext cx="8498026" cy="213271"/>
           </a:xfrm>
           <a:prstGeom prst="rect">

--- a/exports/pptx/lessons/senior-module-02-panchabhuta/day-01-hook.pptx
+++ b/exports/pptx/lessons/senior-module-02-panchabhuta/day-01-hook.pptx
@@ -15,9 +15,13 @@
     <p:sldId id="263" r:id="rId9"/>
     <p:sldId id="264" r:id="rId10"/>
     <p:sldId id="265" r:id="rId11"/>
+    <p:sldId id="266" r:id="rId12"/>
+    <p:sldId id="267" r:id="rId13"/>
+    <p:sldId id="268" r:id="rId14"/>
+    <p:sldId id="269" r:id="rId15"/>
   </p:sldIdLst>
   <p:notesMasterIdLst>
-    <p:notesMasterId r:id="rId12"/>
+    <p:notesMasterId r:id="rId16"/>
   </p:notesMasterIdLst>
   <p:sldSz cx="9144000" cy="5143500"/>
   <p:notesSz cx="5143500" cy="9144000"/>
@@ -623,6 +627,358 @@
             <a:fld id="{F7021451-1387-4CA6-816F-3879F97B5CBC}" type="slidenum">
               <a:rPr lang="en-US"/>
               <a:t>10</a:t>
+            </a:fld>
+            <a:endParaRPr lang="en-US"/>
+          </a:p>
+        </p:txBody>
+      </p:sp>
+    </p:spTree>
+    <p:extLst>
+      <p:ext uri="{BB962C8B-B14F-4D97-AF65-F5344CB8AC3E}">
+        <p14:creationId xmlns:p14="http://schemas.microsoft.com/office/powerpoint/2010/main" val="1024086991"/>
+      </p:ext>
+    </p:extLst>
+  </p:cSld>
+  <p:clrMapOvr>
+    <a:masterClrMapping/>
+  </p:clrMapOvr>
+</p:notes>
+</file>
+
+<file path=ppt/notesSlides/notesSlide11.xml><?xml version="1.0" encoding="utf-8"?>
+<p:notes xmlns:a="http://schemas.openxmlformats.org/drawingml/2006/main" xmlns:r="http://schemas.openxmlformats.org/officeDocument/2006/relationships" xmlns:p="http://schemas.openxmlformats.org/presentationml/2006/main">
+  <p:cSld>
+    <p:spTree>
+      <p:nvGrpSpPr>
+        <p:cNvPr id="1" name=""/>
+        <p:cNvGrpSpPr/>
+        <p:nvPr/>
+      </p:nvGrpSpPr>
+      <p:grpSpPr>
+        <a:xfrm>
+          <a:off x="0" y="0"/>
+          <a:ext cx="0" cy="0"/>
+          <a:chOff x="0" y="0"/>
+          <a:chExt cx="0" cy="0"/>
+        </a:xfrm>
+      </p:grpSpPr>
+      <p:sp>
+        <p:nvSpPr>
+          <p:cNvPr id="2" name="Slide Image Placeholder 1"/>
+          <p:cNvSpPr>
+            <a:spLocks noGrp="1" noRot="1" noChangeAspect="1"/>
+          </p:cNvSpPr>
+          <p:nvPr>
+            <p:ph type="sldImg"/>
+          </p:nvPr>
+        </p:nvSpPr>
+        <p:spPr/>
+      </p:sp>
+      <p:sp>
+        <p:nvSpPr>
+          <p:cNvPr id="3" name="Notes Placeholder 2"/>
+          <p:cNvSpPr>
+            <a:spLocks noGrp="1"/>
+          </p:cNvSpPr>
+          <p:nvPr>
+            <p:ph type="body" idx="1"/>
+          </p:nvPr>
+        </p:nvSpPr>
+        <p:spPr/>
+        <p:txBody>
+          <a:bodyPr/>
+          <a:lstStyle/>
+          <a:p>
+            <a:r>
+              <a:rPr lang="en-US" dirty="0"/>
+              <a:t/>
+            </a:r>
+            <a:endParaRPr lang="en-US" dirty="0"/>
+          </a:p>
+        </p:txBody>
+      </p:sp>
+      <p:sp>
+        <p:nvSpPr>
+          <p:cNvPr id="4" name="Slide Number Placeholder 3"/>
+          <p:cNvSpPr>
+            <a:spLocks noGrp="1"/>
+          </p:cNvSpPr>
+          <p:nvPr>
+            <p:ph type="sldNum" sz="quarter" idx="10"/>
+          </p:nvPr>
+        </p:nvSpPr>
+        <p:spPr/>
+        <p:txBody>
+          <a:bodyPr/>
+          <a:lstStyle/>
+          <a:p>
+            <a:fld id="{F7021451-1387-4CA6-816F-3879F97B5CBC}" type="slidenum">
+              <a:rPr lang="en-US"/>
+              <a:t>11</a:t>
+            </a:fld>
+            <a:endParaRPr lang="en-US"/>
+          </a:p>
+        </p:txBody>
+      </p:sp>
+    </p:spTree>
+    <p:extLst>
+      <p:ext uri="{BB962C8B-B14F-4D97-AF65-F5344CB8AC3E}">
+        <p14:creationId xmlns:p14="http://schemas.microsoft.com/office/powerpoint/2010/main" val="1024086991"/>
+      </p:ext>
+    </p:extLst>
+  </p:cSld>
+  <p:clrMapOvr>
+    <a:masterClrMapping/>
+  </p:clrMapOvr>
+</p:notes>
+</file>
+
+<file path=ppt/notesSlides/notesSlide12.xml><?xml version="1.0" encoding="utf-8"?>
+<p:notes xmlns:a="http://schemas.openxmlformats.org/drawingml/2006/main" xmlns:r="http://schemas.openxmlformats.org/officeDocument/2006/relationships" xmlns:p="http://schemas.openxmlformats.org/presentationml/2006/main">
+  <p:cSld>
+    <p:spTree>
+      <p:nvGrpSpPr>
+        <p:cNvPr id="1" name=""/>
+        <p:cNvGrpSpPr/>
+        <p:nvPr/>
+      </p:nvGrpSpPr>
+      <p:grpSpPr>
+        <a:xfrm>
+          <a:off x="0" y="0"/>
+          <a:ext cx="0" cy="0"/>
+          <a:chOff x="0" y="0"/>
+          <a:chExt cx="0" cy="0"/>
+        </a:xfrm>
+      </p:grpSpPr>
+      <p:sp>
+        <p:nvSpPr>
+          <p:cNvPr id="2" name="Slide Image Placeholder 1"/>
+          <p:cNvSpPr>
+            <a:spLocks noGrp="1" noRot="1" noChangeAspect="1"/>
+          </p:cNvSpPr>
+          <p:nvPr>
+            <p:ph type="sldImg"/>
+          </p:nvPr>
+        </p:nvSpPr>
+        <p:spPr/>
+      </p:sp>
+      <p:sp>
+        <p:nvSpPr>
+          <p:cNvPr id="3" name="Notes Placeholder 2"/>
+          <p:cNvSpPr>
+            <a:spLocks noGrp="1"/>
+          </p:cNvSpPr>
+          <p:nvPr>
+            <p:ph type="body" idx="1"/>
+          </p:nvPr>
+        </p:nvSpPr>
+        <p:spPr/>
+        <p:txBody>
+          <a:bodyPr/>
+          <a:lstStyle/>
+          <a:p>
+            <a:r>
+              <a:rPr lang="en-US" dirty="0"/>
+              <a:t/>
+            </a:r>
+            <a:endParaRPr lang="en-US" dirty="0"/>
+          </a:p>
+        </p:txBody>
+      </p:sp>
+      <p:sp>
+        <p:nvSpPr>
+          <p:cNvPr id="4" name="Slide Number Placeholder 3"/>
+          <p:cNvSpPr>
+            <a:spLocks noGrp="1"/>
+          </p:cNvSpPr>
+          <p:nvPr>
+            <p:ph type="sldNum" sz="quarter" idx="10"/>
+          </p:nvPr>
+        </p:nvSpPr>
+        <p:spPr/>
+        <p:txBody>
+          <a:bodyPr/>
+          <a:lstStyle/>
+          <a:p>
+            <a:fld id="{F7021451-1387-4CA6-816F-3879F97B5CBC}" type="slidenum">
+              <a:rPr lang="en-US"/>
+              <a:t>12</a:t>
+            </a:fld>
+            <a:endParaRPr lang="en-US"/>
+          </a:p>
+        </p:txBody>
+      </p:sp>
+    </p:spTree>
+    <p:extLst>
+      <p:ext uri="{BB962C8B-B14F-4D97-AF65-F5344CB8AC3E}">
+        <p14:creationId xmlns:p14="http://schemas.microsoft.com/office/powerpoint/2010/main" val="1024086991"/>
+      </p:ext>
+    </p:extLst>
+  </p:cSld>
+  <p:clrMapOvr>
+    <a:masterClrMapping/>
+  </p:clrMapOvr>
+</p:notes>
+</file>
+
+<file path=ppt/notesSlides/notesSlide13.xml><?xml version="1.0" encoding="utf-8"?>
+<p:notes xmlns:a="http://schemas.openxmlformats.org/drawingml/2006/main" xmlns:r="http://schemas.openxmlformats.org/officeDocument/2006/relationships" xmlns:p="http://schemas.openxmlformats.org/presentationml/2006/main">
+  <p:cSld>
+    <p:spTree>
+      <p:nvGrpSpPr>
+        <p:cNvPr id="1" name=""/>
+        <p:cNvGrpSpPr/>
+        <p:nvPr/>
+      </p:nvGrpSpPr>
+      <p:grpSpPr>
+        <a:xfrm>
+          <a:off x="0" y="0"/>
+          <a:ext cx="0" cy="0"/>
+          <a:chOff x="0" y="0"/>
+          <a:chExt cx="0" cy="0"/>
+        </a:xfrm>
+      </p:grpSpPr>
+      <p:sp>
+        <p:nvSpPr>
+          <p:cNvPr id="2" name="Slide Image Placeholder 1"/>
+          <p:cNvSpPr>
+            <a:spLocks noGrp="1" noRot="1" noChangeAspect="1"/>
+          </p:cNvSpPr>
+          <p:nvPr>
+            <p:ph type="sldImg"/>
+          </p:nvPr>
+        </p:nvSpPr>
+        <p:spPr/>
+      </p:sp>
+      <p:sp>
+        <p:nvSpPr>
+          <p:cNvPr id="3" name="Notes Placeholder 2"/>
+          <p:cNvSpPr>
+            <a:spLocks noGrp="1"/>
+          </p:cNvSpPr>
+          <p:nvPr>
+            <p:ph type="body" idx="1"/>
+          </p:nvPr>
+        </p:nvSpPr>
+        <p:spPr/>
+        <p:txBody>
+          <a:bodyPr/>
+          <a:lstStyle/>
+          <a:p>
+            <a:r>
+              <a:rPr lang="en-US" dirty="0"/>
+              <a:t/>
+            </a:r>
+            <a:endParaRPr lang="en-US" dirty="0"/>
+          </a:p>
+        </p:txBody>
+      </p:sp>
+      <p:sp>
+        <p:nvSpPr>
+          <p:cNvPr id="4" name="Slide Number Placeholder 3"/>
+          <p:cNvSpPr>
+            <a:spLocks noGrp="1"/>
+          </p:cNvSpPr>
+          <p:nvPr>
+            <p:ph type="sldNum" sz="quarter" idx="10"/>
+          </p:nvPr>
+        </p:nvSpPr>
+        <p:spPr/>
+        <p:txBody>
+          <a:bodyPr/>
+          <a:lstStyle/>
+          <a:p>
+            <a:fld id="{F7021451-1387-4CA6-816F-3879F97B5CBC}" type="slidenum">
+              <a:rPr lang="en-US"/>
+              <a:t>13</a:t>
+            </a:fld>
+            <a:endParaRPr lang="en-US"/>
+          </a:p>
+        </p:txBody>
+      </p:sp>
+    </p:spTree>
+    <p:extLst>
+      <p:ext uri="{BB962C8B-B14F-4D97-AF65-F5344CB8AC3E}">
+        <p14:creationId xmlns:p14="http://schemas.microsoft.com/office/powerpoint/2010/main" val="1024086991"/>
+      </p:ext>
+    </p:extLst>
+  </p:cSld>
+  <p:clrMapOvr>
+    <a:masterClrMapping/>
+  </p:clrMapOvr>
+</p:notes>
+</file>
+
+<file path=ppt/notesSlides/notesSlide14.xml><?xml version="1.0" encoding="utf-8"?>
+<p:notes xmlns:a="http://schemas.openxmlformats.org/drawingml/2006/main" xmlns:r="http://schemas.openxmlformats.org/officeDocument/2006/relationships" xmlns:p="http://schemas.openxmlformats.org/presentationml/2006/main">
+  <p:cSld>
+    <p:spTree>
+      <p:nvGrpSpPr>
+        <p:cNvPr id="1" name=""/>
+        <p:cNvGrpSpPr/>
+        <p:nvPr/>
+      </p:nvGrpSpPr>
+      <p:grpSpPr>
+        <a:xfrm>
+          <a:off x="0" y="0"/>
+          <a:ext cx="0" cy="0"/>
+          <a:chOff x="0" y="0"/>
+          <a:chExt cx="0" cy="0"/>
+        </a:xfrm>
+      </p:grpSpPr>
+      <p:sp>
+        <p:nvSpPr>
+          <p:cNvPr id="2" name="Slide Image Placeholder 1"/>
+          <p:cNvSpPr>
+            <a:spLocks noGrp="1" noRot="1" noChangeAspect="1"/>
+          </p:cNvSpPr>
+          <p:nvPr>
+            <p:ph type="sldImg"/>
+          </p:nvPr>
+        </p:nvSpPr>
+        <p:spPr/>
+      </p:sp>
+      <p:sp>
+        <p:nvSpPr>
+          <p:cNvPr id="3" name="Notes Placeholder 2"/>
+          <p:cNvSpPr>
+            <a:spLocks noGrp="1"/>
+          </p:cNvSpPr>
+          <p:nvPr>
+            <p:ph type="body" idx="1"/>
+          </p:nvPr>
+        </p:nvSpPr>
+        <p:spPr/>
+        <p:txBody>
+          <a:bodyPr/>
+          <a:lstStyle/>
+          <a:p>
+            <a:r>
+              <a:rPr lang="en-US" dirty="0"/>
+              <a:t/>
+            </a:r>
+            <a:endParaRPr lang="en-US" dirty="0"/>
+          </a:p>
+        </p:txBody>
+      </p:sp>
+      <p:sp>
+        <p:nvSpPr>
+          <p:cNvPr id="4" name="Slide Number Placeholder 3"/>
+          <p:cNvSpPr>
+            <a:spLocks noGrp="1"/>
+          </p:cNvSpPr>
+          <p:nvPr>
+            <p:ph type="sldNum" sz="quarter" idx="10"/>
+          </p:nvPr>
+        </p:nvSpPr>
+        <p:spPr/>
+        <p:txBody>
+          <a:bodyPr/>
+          <a:lstStyle/>
+          <a:p>
+            <a:fld id="{F7021451-1387-4CA6-816F-3879F97B5CBC}" type="slidenum">
+              <a:rPr lang="en-US"/>
+              <a:t>14</a:t>
             </a:fld>
             <a:endParaRPr lang="en-US"/>
           </a:p>
@@ -1876,102 +2232,6 @@
         </p:nvSpPr>
         <p:spPr>
           <a:xfrm>
-            <a:off x="406301" y="1223963"/>
-            <a:ext cx="8498026" cy="274290"/>
-          </a:xfrm>
-          <a:prstGeom prst="rect">
-            <a:avLst/>
-          </a:prstGeom>
-          <a:noFill/>
-          <a:ln/>
-        </p:spPr>
-        <p:txBody>
-          <a:bodyPr wrap="square" lIns="0" tIns="0" rIns="0" bIns="0" rtlCol="0" anchor="t"/>
-          <a:lstStyle/>
-          <a:p>
-            <a:pPr algn="l" indent="0" marL="0">
-              <a:lnSpc>
-                <a:spcPts val="2160"/>
-              </a:lnSpc>
-              <a:spcBef>
-                <a:spcPts val="600"/>
-              </a:spcBef>
-              <a:spcAft>
-                <a:spcPts val="800"/>
-              </a:spcAft>
-              <a:buNone/>
-            </a:pPr>
-            <a:r>
-              <a:rPr lang="en-US" sz="1800" b="1" dirty="0">
-                <a:solidFill>
-                  <a:srgbClr val="997929"/>
-                </a:solidFill>
-                <a:latin typeface="Times New Roman" pitchFamily="34" charset="0"/>
-                <a:ea typeface="Times New Roman" pitchFamily="34" charset="-122"/>
-                <a:cs typeface="Times New Roman" pitchFamily="34" charset="-120"/>
-              </a:rPr>
-              <a:t>Learning objective</a:t>
-            </a:r>
-            <a:endParaRPr lang="en-US" sz="1800" dirty="0"/>
-          </a:p>
-        </p:txBody>
-      </p:sp>
-      <p:sp>
-        <p:nvSpPr>
-          <p:cNvPr id="6" name="Text 4"/>
-          <p:cNvSpPr/>
-          <p:nvPr/>
-        </p:nvSpPr>
-        <p:spPr>
-          <a:xfrm>
-            <a:off x="406301" y="1637854"/>
-            <a:ext cx="8498026" cy="213271"/>
-          </a:xfrm>
-          <a:prstGeom prst="rect">
-            <a:avLst/>
-          </a:prstGeom>
-          <a:noFill/>
-          <a:ln/>
-        </p:spPr>
-        <p:txBody>
-          <a:bodyPr wrap="square" lIns="0" tIns="0" rIns="0" bIns="0" rtlCol="0" anchor="t"/>
-          <a:lstStyle/>
-          <a:p>
-            <a:pPr algn="l" indent="0" marL="0">
-              <a:lnSpc>
-                <a:spcPts val="1680"/>
-              </a:lnSpc>
-              <a:spcBef>
-                <a:spcPts val="300"/>
-              </a:spcBef>
-              <a:spcAft>
-                <a:spcPts val="300"/>
-              </a:spcAft>
-              <a:buNone/>
-            </a:pPr>
-            <a:r>
-              <a:rPr lang="en-US" sz="1200" dirty="0">
-                <a:solidFill>
-                  <a:srgbClr val="1A1A1A"/>
-                </a:solidFill>
-                <a:latin typeface="Georgia" pitchFamily="34" charset="0"/>
-                <a:ea typeface="Georgia" pitchFamily="34" charset="-122"/>
-                <a:cs typeface="Georgia" pitchFamily="34" charset="-120"/>
-              </a:rPr>
-              <a:t>Students articulate what "categorising matter" means and identify three distinct historical frameworks for doing it.</a:t>
-            </a:r>
-            <a:endParaRPr lang="en-US" sz="1200" dirty="0"/>
-          </a:p>
-        </p:txBody>
-      </p:sp>
-      <p:sp>
-        <p:nvSpPr>
-          <p:cNvPr id="7" name="Text 5"/>
-          <p:cNvSpPr/>
-          <p:nvPr/>
-        </p:nvSpPr>
-        <p:spPr>
-          <a:xfrm>
             <a:off x="406301" y="4434929"/>
             <a:ext cx="8498026" cy="213271"/>
           </a:xfrm>
@@ -2116,7 +2376,7 @@
                 <a:ea typeface="Times New Roman" pitchFamily="34" charset="-122"/>
                 <a:cs typeface="Times New Roman" pitchFamily="34" charset="-120"/>
               </a:rPr>
-              <a:t>Citation(s) used</a:t>
+              <a:t>Discussion (10 min)</a:t>
             </a:r>
             <a:endParaRPr lang="en-US" sz="1800" dirty="0"/>
           </a:p>
@@ -2131,7 +2391,7 @@
         <p:spPr>
           <a:xfrm>
             <a:off x="406301" y="870942"/>
-            <a:ext cx="8498026" cy="222796"/>
+            <a:ext cx="8498026" cy="213271"/>
           </a:xfrm>
           <a:prstGeom prst="rect">
             <a:avLst/>
@@ -2164,7 +2424,7 @@
                 <a:ea typeface="Georgia" pitchFamily="34" charset="-122"/>
                 <a:cs typeface="Georgia" pitchFamily="34" charset="-120"/>
               </a:rPr>
-              <a:t>– SB 2.10.3 — vidya-karana RAG cache </a:t>
+              <a:t>Open question: </a:t>
             </a:r>
             <a:pPr algn="l" indent="0" marL="0">
               <a:lnSpc>
@@ -2173,6 +2433,1204 @@
               <a:spcBef>
                 <a:spcPts val="300"/>
               </a:spcBef>
+              <a:spcAft>
+                <a:spcPts val="300"/>
+              </a:spcAft>
+              <a:buNone/>
+            </a:pPr>
+            <a:r>
+              <a:rPr lang="en-US" sz="1200" i="1" dirty="0">
+                <a:solidFill>
+                  <a:srgbClr val="1A1A1A"/>
+                </a:solidFill>
+                <a:latin typeface="Georgia" pitchFamily="34" charset="0"/>
+                <a:ea typeface="Georgia" pitchFamily="34" charset="-122"/>
+                <a:cs typeface="Georgia" pitchFamily="34" charset="-120"/>
+              </a:rPr>
+              <a:t>"Is the modern periodic table 'more correct' than Empedocles' four elements? More correct in what way?"</a:t>
+            </a:r>
+            <a:endParaRPr lang="en-US" sz="1200" dirty="0"/>
+          </a:p>
+        </p:txBody>
+      </p:sp>
+      <p:sp>
+        <p:nvSpPr>
+          <p:cNvPr id="5" name="Text 3"/>
+          <p:cNvSpPr/>
+          <p:nvPr/>
+        </p:nvSpPr>
+        <p:spPr>
+          <a:xfrm>
+            <a:off x="634901" y="1173063"/>
+            <a:ext cx="8102798" cy="731341"/>
+          </a:xfrm>
+          <a:prstGeom prst="rect">
+            <a:avLst/>
+          </a:prstGeom>
+          <a:noFill/>
+          <a:ln/>
+        </p:spPr>
+        <p:txBody>
+          <a:bodyPr wrap="square" lIns="0" tIns="0" rIns="0" bIns="0" rtlCol="0" anchor="t"/>
+          <a:lstStyle/>
+          <a:p>
+            <a:pPr algn="l" marL="342900" indent="-342900">
+              <a:lnSpc>
+                <a:spcPts val="1620"/>
+              </a:lnSpc>
+              <a:spcAft>
+                <a:spcPts val="300"/>
+              </a:spcAft>
+              <a:buSzPct val="100000"/>
+              <a:buChar char="•"/>
+            </a:pPr>
+            <a:r>
+              <a:rPr lang="en-US" sz="1200" dirty="0">
+                <a:solidFill>
+                  <a:srgbClr val="1A1A1A"/>
+                </a:solidFill>
+                <a:latin typeface="Georgia" pitchFamily="34" charset="0"/>
+                <a:ea typeface="Georgia" pitchFamily="34" charset="-122"/>
+                <a:cs typeface="Georgia" pitchFamily="34" charset="-120"/>
+              </a:rPr>
+              <a:t>Let students argue.</a:t>
+            </a:r>
+            <a:endParaRPr lang="en-US" sz="1200" dirty="0"/>
+          </a:p>
+          <a:p>
+            <a:pPr algn="l" marL="342900" indent="-342900">
+              <a:lnSpc>
+                <a:spcPts val="1620"/>
+              </a:lnSpc>
+              <a:spcAft>
+                <a:spcPts val="300"/>
+              </a:spcAft>
+              <a:buSzPct val="100000"/>
+              <a:buChar char="•"/>
+            </a:pPr>
+            <a:r>
+              <a:rPr lang="en-US" sz="1200" dirty="0">
+                <a:solidFill>
+                  <a:srgbClr val="1A1A1A"/>
+                </a:solidFill>
+                <a:latin typeface="Georgia" pitchFamily="34" charset="0"/>
+                <a:ea typeface="Georgia" pitchFamily="34" charset="-122"/>
+                <a:cs typeface="Georgia" pitchFamily="34" charset="-120"/>
+              </a:rPr>
+              <a:t>Reinforce: a framework can be more </a:t>
+            </a:r>
+            <a:pPr algn="l" indent="0" marL="0">
+              <a:lnSpc>
+                <a:spcPts val="1620"/>
+              </a:lnSpc>
+              <a:spcAft>
+                <a:spcPts val="300"/>
+              </a:spcAft>
+              <a:buNone/>
+            </a:pPr>
+            <a:r>
+              <a:rPr lang="en-US" sz="1200" i="1" dirty="0">
+                <a:solidFill>
+                  <a:srgbClr val="1A1A1A"/>
+                </a:solidFill>
+                <a:latin typeface="Georgia" pitchFamily="34" charset="0"/>
+                <a:ea typeface="Georgia" pitchFamily="34" charset="-122"/>
+                <a:cs typeface="Georgia" pitchFamily="34" charset="-120"/>
+              </a:rPr>
+              <a:t>predictive</a:t>
+            </a:r>
+            <a:pPr algn="l" indent="0" marL="0">
+              <a:lnSpc>
+                <a:spcPts val="1620"/>
+              </a:lnSpc>
+              <a:spcAft>
+                <a:spcPts val="300"/>
+              </a:spcAft>
+              <a:buNone/>
+            </a:pPr>
+            <a:r>
+              <a:rPr lang="en-US" sz="1200" dirty="0">
+                <a:solidFill>
+                  <a:srgbClr val="1A1A1A"/>
+                </a:solidFill>
+                <a:latin typeface="Georgia" pitchFamily="34" charset="0"/>
+                <a:ea typeface="Georgia" pitchFamily="34" charset="-122"/>
+                <a:cs typeface="Georgia" pitchFamily="34" charset="-120"/>
+              </a:rPr>
+              <a:t> (chemistry, atomic structure) without being more </a:t>
+            </a:r>
+            <a:pPr algn="l" indent="0" marL="0">
+              <a:lnSpc>
+                <a:spcPts val="1620"/>
+              </a:lnSpc>
+              <a:spcAft>
+                <a:spcPts val="300"/>
+              </a:spcAft>
+              <a:buNone/>
+            </a:pPr>
+            <a:r>
+              <a:rPr lang="en-US" sz="1200" i="1" dirty="0">
+                <a:solidFill>
+                  <a:srgbClr val="1A1A1A"/>
+                </a:solidFill>
+                <a:latin typeface="Georgia" pitchFamily="34" charset="0"/>
+                <a:ea typeface="Georgia" pitchFamily="34" charset="-122"/>
+                <a:cs typeface="Georgia" pitchFamily="34" charset="-120"/>
+              </a:rPr>
+              <a:t>comprehensive</a:t>
+            </a:r>
+            <a:pPr algn="l" indent="0" marL="0">
+              <a:lnSpc>
+                <a:spcPts val="1620"/>
+              </a:lnSpc>
+              <a:spcAft>
+                <a:spcPts val="300"/>
+              </a:spcAft>
+              <a:buNone/>
+            </a:pPr>
+            <a:r>
+              <a:rPr lang="en-US" sz="1200" dirty="0">
+                <a:solidFill>
+                  <a:srgbClr val="1A1A1A"/>
+                </a:solidFill>
+                <a:latin typeface="Georgia" pitchFamily="34" charset="0"/>
+                <a:ea typeface="Georgia" pitchFamily="34" charset="-122"/>
+                <a:cs typeface="Georgia" pitchFamily="34" charset="-120"/>
+              </a:rPr>
+              <a:t> (the Sāṅkhya scheme includes consciousness; modern chemistry doesn't claim to).</a:t>
+            </a:r>
+            <a:endParaRPr lang="en-US" sz="1200" dirty="0"/>
+          </a:p>
+        </p:txBody>
+      </p:sp>
+      <p:sp>
+        <p:nvSpPr>
+          <p:cNvPr id="6" name="Text 4"/>
+          <p:cNvSpPr/>
+          <p:nvPr/>
+        </p:nvSpPr>
+        <p:spPr>
+          <a:xfrm>
+            <a:off x="406301" y="4434929"/>
+            <a:ext cx="8498026" cy="213271"/>
+          </a:xfrm>
+          <a:prstGeom prst="rect">
+            <a:avLst/>
+          </a:prstGeom>
+          <a:noFill/>
+          <a:ln/>
+        </p:spPr>
+        <p:txBody>
+          <a:bodyPr wrap="square" lIns="0" tIns="0" rIns="0" bIns="0" rtlCol="0" anchor="t"/>
+          <a:lstStyle/>
+          <a:p>
+            <a:pPr algn="l" indent="0" marL="0">
+              <a:lnSpc>
+                <a:spcPts val="1680"/>
+              </a:lnSpc>
+              <a:spcBef>
+                <a:spcPts val="300"/>
+              </a:spcBef>
+              <a:spcAft>
+                <a:spcPts val="300"/>
+              </a:spcAft>
+              <a:buNone/>
+            </a:pPr>
+            <a:r>
+              <a:rPr lang="en-US" sz="1200" dirty="0">
+                <a:solidFill>
+                  <a:srgbClr val="1A1A1A"/>
+                </a:solidFill>
+                <a:latin typeface="Georgia" pitchFamily="34" charset="0"/>
+                <a:ea typeface="Georgia" pitchFamily="34" charset="-122"/>
+                <a:cs typeface="Georgia" pitchFamily="34" charset="-120"/>
+              </a:rPr>
+              <a:t>Senior ·  · IKS Curriculum</a:t>
+            </a:r>
+            <a:endParaRPr lang="en-US" sz="1200" dirty="0"/>
+          </a:p>
+        </p:txBody>
+      </p:sp>
+    </p:spTree>
+  </p:cSld>
+  <p:clrMapOvr>
+    <a:masterClrMapping/>
+  </p:clrMapOvr>
+</p:sld>
+</file>
+
+<file path=ppt/slides/slide11.xml><?xml version="1.0" encoding="utf-8"?>
+<p:sld xmlns:a="http://schemas.openxmlformats.org/drawingml/2006/main" xmlns:r="http://schemas.openxmlformats.org/officeDocument/2006/relationships" xmlns:p="http://schemas.openxmlformats.org/presentationml/2006/main">
+  <p:cSld name="Slide 11">
+    <p:bg>
+      <p:bgPr>
+        <a:solidFill>
+          <a:srgbClr val="FAF7F2"/>
+        </a:solidFill>
+      </p:bgPr>
+    </p:bg>
+    <p:spTree>
+      <p:nvGrpSpPr>
+        <p:cNvPr id="1" name=""/>
+        <p:cNvGrpSpPr/>
+        <p:nvPr/>
+      </p:nvGrpSpPr>
+      <p:grpSpPr>
+        <a:xfrm>
+          <a:off x="0" y="0"/>
+          <a:ext cx="0" cy="0"/>
+          <a:chOff x="0" y="0"/>
+          <a:chExt cx="0" cy="0"/>
+        </a:xfrm>
+      </p:grpSpPr>
+      <p:sp>
+        <p:nvSpPr>
+          <p:cNvPr id="2" name="Text 0"/>
+          <p:cNvSpPr/>
+          <p:nvPr/>
+        </p:nvSpPr>
+        <p:spPr>
+          <a:xfrm>
+            <a:off x="0" y="0"/>
+            <a:ext cx="9144000" cy="101501"/>
+          </a:xfrm>
+          <a:prstGeom prst="rect">
+            <a:avLst/>
+          </a:prstGeom>
+          <a:solidFill>
+            <a:srgbClr val="5D1D2E"/>
+          </a:solidFill>
+          <a:ln/>
+        </p:spPr>
+        <p:txBody>
+          <a:bodyPr wrap="square" rtlCol="0" anchor="ctr"/>
+          <a:lstStyle/>
+          <a:p>
+            <a:pPr indent="0" marL="0">
+              <a:buNone/>
+            </a:pPr>
+            <a:endParaRPr lang="en-US" dirty="0"/>
+          </a:p>
+        </p:txBody>
+      </p:sp>
+      <p:sp>
+        <p:nvSpPr>
+          <p:cNvPr id="3" name="Text 1"/>
+          <p:cNvSpPr/>
+          <p:nvPr/>
+        </p:nvSpPr>
+        <p:spPr>
+          <a:xfrm>
+            <a:off x="406301" y="457051"/>
+            <a:ext cx="8498026" cy="274290"/>
+          </a:xfrm>
+          <a:prstGeom prst="rect">
+            <a:avLst/>
+          </a:prstGeom>
+          <a:noFill/>
+          <a:ln/>
+        </p:spPr>
+        <p:txBody>
+          <a:bodyPr wrap="square" lIns="0" tIns="0" rIns="0" bIns="0" rtlCol="0" anchor="t"/>
+          <a:lstStyle/>
+          <a:p>
+            <a:pPr algn="l" indent="0" marL="0">
+              <a:lnSpc>
+                <a:spcPts val="2160"/>
+              </a:lnSpc>
+              <a:spcBef>
+                <a:spcPts val="600"/>
+              </a:spcBef>
+              <a:spcAft>
+                <a:spcPts val="800"/>
+              </a:spcAft>
+              <a:buNone/>
+            </a:pPr>
+            <a:r>
+              <a:rPr lang="en-US" sz="1800" b="1" dirty="0">
+                <a:solidFill>
+                  <a:srgbClr val="997929"/>
+                </a:solidFill>
+                <a:latin typeface="Times New Roman" pitchFamily="34" charset="0"/>
+                <a:ea typeface="Times New Roman" pitchFamily="34" charset="-122"/>
+                <a:cs typeface="Times New Roman" pitchFamily="34" charset="-120"/>
+              </a:rPr>
+              <a:t>Wrap-up (5 min)</a:t>
+            </a:r>
+            <a:endParaRPr lang="en-US" sz="1800" dirty="0"/>
+          </a:p>
+        </p:txBody>
+      </p:sp>
+      <p:sp>
+        <p:nvSpPr>
+          <p:cNvPr id="4" name="Text 2"/>
+          <p:cNvSpPr/>
+          <p:nvPr/>
+        </p:nvSpPr>
+        <p:spPr>
+          <a:xfrm>
+            <a:off x="634901" y="883593"/>
+            <a:ext cx="8102798" cy="525661"/>
+          </a:xfrm>
+          <a:prstGeom prst="rect">
+            <a:avLst/>
+          </a:prstGeom>
+          <a:noFill/>
+          <a:ln/>
+        </p:spPr>
+        <p:txBody>
+          <a:bodyPr wrap="square" lIns="0" tIns="0" rIns="0" bIns="0" rtlCol="0" anchor="t"/>
+          <a:lstStyle/>
+          <a:p>
+            <a:pPr algn="l" marL="342900" indent="-342900">
+              <a:lnSpc>
+                <a:spcPts val="1620"/>
+              </a:lnSpc>
+              <a:spcAft>
+                <a:spcPts val="300"/>
+              </a:spcAft>
+              <a:buSzPct val="100000"/>
+              <a:buChar char="•"/>
+            </a:pPr>
+            <a:r>
+              <a:rPr lang="en-US" sz="1200" dirty="0">
+                <a:solidFill>
+                  <a:srgbClr val="1A1A1A"/>
+                </a:solidFill>
+                <a:latin typeface="Georgia" pitchFamily="34" charset="0"/>
+                <a:ea typeface="Georgia" pitchFamily="34" charset="-122"/>
+                <a:cs typeface="Georgia" pitchFamily="34" charset="-120"/>
+              </a:rPr>
+              <a:t>Preview Day 2: </a:t>
+            </a:r>
+            <a:pPr algn="l" indent="0" marL="0">
+              <a:lnSpc>
+                <a:spcPts val="1620"/>
+              </a:lnSpc>
+              <a:spcAft>
+                <a:spcPts val="300"/>
+              </a:spcAft>
+              <a:buNone/>
+            </a:pPr>
+            <a:r>
+              <a:rPr lang="en-US" sz="1200" i="1" dirty="0">
+                <a:solidFill>
+                  <a:srgbClr val="1A1A1A"/>
+                </a:solidFill>
+                <a:latin typeface="Georgia" pitchFamily="34" charset="0"/>
+                <a:ea typeface="Georgia" pitchFamily="34" charset="-122"/>
+                <a:cs typeface="Georgia" pitchFamily="34" charset="-120"/>
+              </a:rPr>
+              <a:t>"Tomorrow we map out the full 25-tattva ladder of Sāṅkhya. The five elements are only the LAST five."</a:t>
+            </a:r>
+            <a:endParaRPr lang="en-US" sz="1200" dirty="0"/>
+          </a:p>
+          <a:p>
+            <a:pPr algn="l" marL="342900" indent="-342900">
+              <a:lnSpc>
+                <a:spcPts val="1620"/>
+              </a:lnSpc>
+              <a:spcAft>
+                <a:spcPts val="300"/>
+              </a:spcAft>
+              <a:buSzPct val="100000"/>
+              <a:buChar char="•"/>
+            </a:pPr>
+            <a:r>
+              <a:rPr lang="en-US" sz="1200" dirty="0">
+                <a:solidFill>
+                  <a:srgbClr val="1A1A1A"/>
+                </a:solidFill>
+                <a:latin typeface="Georgia" pitchFamily="34" charset="0"/>
+                <a:ea typeface="Georgia" pitchFamily="34" charset="-122"/>
+                <a:cs typeface="Georgia" pitchFamily="34" charset="-120"/>
+              </a:rPr>
+              <a:t>Homework: read the SB 2.10.3 cache entry in full. Note one question you have.</a:t>
+            </a:r>
+            <a:endParaRPr lang="en-US" sz="1200" dirty="0"/>
+          </a:p>
+        </p:txBody>
+      </p:sp>
+      <p:sp>
+        <p:nvSpPr>
+          <p:cNvPr id="5" name="Text 3"/>
+          <p:cNvSpPr/>
+          <p:nvPr/>
+        </p:nvSpPr>
+        <p:spPr>
+          <a:xfrm>
+            <a:off x="406301" y="4434929"/>
+            <a:ext cx="8498026" cy="213271"/>
+          </a:xfrm>
+          <a:prstGeom prst="rect">
+            <a:avLst/>
+          </a:prstGeom>
+          <a:noFill/>
+          <a:ln/>
+        </p:spPr>
+        <p:txBody>
+          <a:bodyPr wrap="square" lIns="0" tIns="0" rIns="0" bIns="0" rtlCol="0" anchor="t"/>
+          <a:lstStyle/>
+          <a:p>
+            <a:pPr algn="l" indent="0" marL="0">
+              <a:lnSpc>
+                <a:spcPts val="1680"/>
+              </a:lnSpc>
+              <a:spcBef>
+                <a:spcPts val="300"/>
+              </a:spcBef>
+              <a:spcAft>
+                <a:spcPts val="300"/>
+              </a:spcAft>
+              <a:buNone/>
+            </a:pPr>
+            <a:r>
+              <a:rPr lang="en-US" sz="1200" dirty="0">
+                <a:solidFill>
+                  <a:srgbClr val="1A1A1A"/>
+                </a:solidFill>
+                <a:latin typeface="Georgia" pitchFamily="34" charset="0"/>
+                <a:ea typeface="Georgia" pitchFamily="34" charset="-122"/>
+                <a:cs typeface="Georgia" pitchFamily="34" charset="-120"/>
+              </a:rPr>
+              <a:t>Senior ·  · IKS Curriculum</a:t>
+            </a:r>
+            <a:endParaRPr lang="en-US" sz="1200" dirty="0"/>
+          </a:p>
+        </p:txBody>
+      </p:sp>
+    </p:spTree>
+  </p:cSld>
+  <p:clrMapOvr>
+    <a:masterClrMapping/>
+  </p:clrMapOvr>
+</p:sld>
+</file>
+
+<file path=ppt/slides/slide12.xml><?xml version="1.0" encoding="utf-8"?>
+<p:sld xmlns:a="http://schemas.openxmlformats.org/drawingml/2006/main" xmlns:r="http://schemas.openxmlformats.org/officeDocument/2006/relationships" xmlns:p="http://schemas.openxmlformats.org/presentationml/2006/main">
+  <p:cSld name="Slide 12">
+    <p:bg>
+      <p:bgPr>
+        <a:solidFill>
+          <a:srgbClr val="FAF7F2"/>
+        </a:solidFill>
+      </p:bgPr>
+    </p:bg>
+    <p:spTree>
+      <p:nvGrpSpPr>
+        <p:cNvPr id="1" name=""/>
+        <p:cNvGrpSpPr/>
+        <p:nvPr/>
+      </p:nvGrpSpPr>
+      <p:grpSpPr>
+        <a:xfrm>
+          <a:off x="0" y="0"/>
+          <a:ext cx="0" cy="0"/>
+          <a:chOff x="0" y="0"/>
+          <a:chExt cx="0" cy="0"/>
+        </a:xfrm>
+      </p:grpSpPr>
+      <p:sp>
+        <p:nvSpPr>
+          <p:cNvPr id="2" name="Text 0"/>
+          <p:cNvSpPr/>
+          <p:nvPr/>
+        </p:nvSpPr>
+        <p:spPr>
+          <a:xfrm>
+            <a:off x="0" y="0"/>
+            <a:ext cx="9144000" cy="101501"/>
+          </a:xfrm>
+          <a:prstGeom prst="rect">
+            <a:avLst/>
+          </a:prstGeom>
+          <a:solidFill>
+            <a:srgbClr val="5D1D2E"/>
+          </a:solidFill>
+          <a:ln/>
+        </p:spPr>
+        <p:txBody>
+          <a:bodyPr wrap="square" rtlCol="0" anchor="ctr"/>
+          <a:lstStyle/>
+          <a:p>
+            <a:pPr indent="0" marL="0">
+              <a:buNone/>
+            </a:pPr>
+            <a:endParaRPr lang="en-US" dirty="0"/>
+          </a:p>
+        </p:txBody>
+      </p:sp>
+      <p:sp>
+        <p:nvSpPr>
+          <p:cNvPr id="3" name="Text 1"/>
+          <p:cNvSpPr/>
+          <p:nvPr/>
+        </p:nvSpPr>
+        <p:spPr>
+          <a:xfrm>
+            <a:off x="406301" y="457051"/>
+            <a:ext cx="8498026" cy="274290"/>
+          </a:xfrm>
+          <a:prstGeom prst="rect">
+            <a:avLst/>
+          </a:prstGeom>
+          <a:noFill/>
+          <a:ln/>
+        </p:spPr>
+        <p:txBody>
+          <a:bodyPr wrap="square" lIns="0" tIns="0" rIns="0" bIns="0" rtlCol="0" anchor="t"/>
+          <a:lstStyle/>
+          <a:p>
+            <a:pPr algn="l" indent="0" marL="0">
+              <a:lnSpc>
+                <a:spcPts val="2160"/>
+              </a:lnSpc>
+              <a:spcBef>
+                <a:spcPts val="600"/>
+              </a:spcBef>
+              <a:spcAft>
+                <a:spcPts val="800"/>
+              </a:spcAft>
+              <a:buNone/>
+            </a:pPr>
+            <a:r>
+              <a:rPr lang="en-US" sz="1800" b="1" dirty="0">
+                <a:solidFill>
+                  <a:srgbClr val="997929"/>
+                </a:solidFill>
+                <a:latin typeface="Times New Roman" pitchFamily="34" charset="0"/>
+                <a:ea typeface="Times New Roman" pitchFamily="34" charset="-122"/>
+                <a:cs typeface="Times New Roman" pitchFamily="34" charset="-120"/>
+              </a:rPr>
+              <a:t>Differentiation</a:t>
+            </a:r>
+            <a:endParaRPr lang="en-US" sz="1800" dirty="0"/>
+          </a:p>
+        </p:txBody>
+      </p:sp>
+      <p:sp>
+        <p:nvSpPr>
+          <p:cNvPr id="4" name="Text 2"/>
+          <p:cNvSpPr/>
+          <p:nvPr/>
+        </p:nvSpPr>
+        <p:spPr>
+          <a:xfrm>
+            <a:off x="634901" y="883593"/>
+            <a:ext cx="8102798" cy="525661"/>
+          </a:xfrm>
+          <a:prstGeom prst="rect">
+            <a:avLst/>
+          </a:prstGeom>
+          <a:noFill/>
+          <a:ln/>
+        </p:spPr>
+        <p:txBody>
+          <a:bodyPr wrap="square" lIns="0" tIns="0" rIns="0" bIns="0" rtlCol="0" anchor="t"/>
+          <a:lstStyle/>
+          <a:p>
+            <a:pPr algn="l" marL="342900" indent="-342900">
+              <a:lnSpc>
+                <a:spcPts val="1620"/>
+              </a:lnSpc>
+              <a:spcAft>
+                <a:spcPts val="300"/>
+              </a:spcAft>
+              <a:buSzPct val="100000"/>
+              <a:buChar char="•"/>
+            </a:pPr>
+            <a:r>
+              <a:rPr lang="en-US" sz="1200" b="1" dirty="0">
+                <a:solidFill>
+                  <a:srgbClr val="1A1A1A"/>
+                </a:solidFill>
+                <a:latin typeface="Georgia" pitchFamily="34" charset="0"/>
+                <a:ea typeface="Georgia" pitchFamily="34" charset="-122"/>
+                <a:cs typeface="Georgia" pitchFamily="34" charset="-120"/>
+              </a:rPr>
+              <a:t>Tier up:</a:t>
+            </a:r>
+            <a:pPr algn="l" indent="0" marL="0">
+              <a:lnSpc>
+                <a:spcPts val="1620"/>
+              </a:lnSpc>
+              <a:spcAft>
+                <a:spcPts val="300"/>
+              </a:spcAft>
+              <a:buNone/>
+            </a:pPr>
+            <a:r>
+              <a:rPr lang="en-US" sz="1200" dirty="0">
+                <a:solidFill>
+                  <a:srgbClr val="1A1A1A"/>
+                </a:solidFill>
+                <a:latin typeface="Georgia" pitchFamily="34" charset="0"/>
+                <a:ea typeface="Georgia" pitchFamily="34" charset="-122"/>
+                <a:cs typeface="Georgia" pitchFamily="34" charset="-120"/>
+              </a:rPr>
+              <a:t> Read Kirk, Raven &amp; Schofield's intro on Empedocles. Be ready to present on Day 4.</a:t>
+            </a:r>
+            <a:endParaRPr lang="en-US" sz="1200" dirty="0"/>
+          </a:p>
+          <a:p>
+            <a:pPr algn="l" marL="342900" indent="-342900">
+              <a:lnSpc>
+                <a:spcPts val="1620"/>
+              </a:lnSpc>
+              <a:spcAft>
+                <a:spcPts val="300"/>
+              </a:spcAft>
+              <a:buSzPct val="100000"/>
+              <a:buChar char="•"/>
+            </a:pPr>
+            <a:r>
+              <a:rPr lang="en-US" sz="1200" b="1" dirty="0">
+                <a:solidFill>
+                  <a:srgbClr val="1A1A1A"/>
+                </a:solidFill>
+                <a:latin typeface="Georgia" pitchFamily="34" charset="0"/>
+                <a:ea typeface="Georgia" pitchFamily="34" charset="-122"/>
+                <a:cs typeface="Georgia" pitchFamily="34" charset="-120"/>
+              </a:rPr>
+              <a:t>Tier down:</a:t>
+            </a:r>
+            <a:pPr algn="l" indent="0" marL="0">
+              <a:lnSpc>
+                <a:spcPts val="1620"/>
+              </a:lnSpc>
+              <a:spcAft>
+                <a:spcPts val="300"/>
+              </a:spcAft>
+              <a:buNone/>
+            </a:pPr>
+            <a:r>
+              <a:rPr lang="en-US" sz="1200" dirty="0">
+                <a:solidFill>
+                  <a:srgbClr val="1A1A1A"/>
+                </a:solidFill>
+                <a:latin typeface="Georgia" pitchFamily="34" charset="0"/>
+                <a:ea typeface="Georgia" pitchFamily="34" charset="-122"/>
+                <a:cs typeface="Georgia" pitchFamily="34" charset="-120"/>
+              </a:rPr>
+              <a:t> Stick to the framework-comparison; the primary-source reading deepens on Day 5.</a:t>
+            </a:r>
+            <a:endParaRPr lang="en-US" sz="1200" dirty="0"/>
+          </a:p>
+        </p:txBody>
+      </p:sp>
+      <p:sp>
+        <p:nvSpPr>
+          <p:cNvPr id="5" name="Text 3"/>
+          <p:cNvSpPr/>
+          <p:nvPr/>
+        </p:nvSpPr>
+        <p:spPr>
+          <a:xfrm>
+            <a:off x="406301" y="4434929"/>
+            <a:ext cx="8498026" cy="213271"/>
+          </a:xfrm>
+          <a:prstGeom prst="rect">
+            <a:avLst/>
+          </a:prstGeom>
+          <a:noFill/>
+          <a:ln/>
+        </p:spPr>
+        <p:txBody>
+          <a:bodyPr wrap="square" lIns="0" tIns="0" rIns="0" bIns="0" rtlCol="0" anchor="t"/>
+          <a:lstStyle/>
+          <a:p>
+            <a:pPr algn="l" indent="0" marL="0">
+              <a:lnSpc>
+                <a:spcPts val="1680"/>
+              </a:lnSpc>
+              <a:spcBef>
+                <a:spcPts val="300"/>
+              </a:spcBef>
+              <a:spcAft>
+                <a:spcPts val="300"/>
+              </a:spcAft>
+              <a:buNone/>
+            </a:pPr>
+            <a:r>
+              <a:rPr lang="en-US" sz="1200" dirty="0">
+                <a:solidFill>
+                  <a:srgbClr val="1A1A1A"/>
+                </a:solidFill>
+                <a:latin typeface="Georgia" pitchFamily="34" charset="0"/>
+                <a:ea typeface="Georgia" pitchFamily="34" charset="-122"/>
+                <a:cs typeface="Georgia" pitchFamily="34" charset="-120"/>
+              </a:rPr>
+              <a:t>Senior ·  · IKS Curriculum</a:t>
+            </a:r>
+            <a:endParaRPr lang="en-US" sz="1200" dirty="0"/>
+          </a:p>
+        </p:txBody>
+      </p:sp>
+    </p:spTree>
+  </p:cSld>
+  <p:clrMapOvr>
+    <a:masterClrMapping/>
+  </p:clrMapOvr>
+</p:sld>
+</file>
+
+<file path=ppt/slides/slide13.xml><?xml version="1.0" encoding="utf-8"?>
+<p:sld xmlns:a="http://schemas.openxmlformats.org/drawingml/2006/main" xmlns:r="http://schemas.openxmlformats.org/officeDocument/2006/relationships" xmlns:p="http://schemas.openxmlformats.org/presentationml/2006/main">
+  <p:cSld name="Slide 13">
+    <p:bg>
+      <p:bgPr>
+        <a:solidFill>
+          <a:srgbClr val="FAF7F2"/>
+        </a:solidFill>
+      </p:bgPr>
+    </p:bg>
+    <p:spTree>
+      <p:nvGrpSpPr>
+        <p:cNvPr id="1" name=""/>
+        <p:cNvGrpSpPr/>
+        <p:nvPr/>
+      </p:nvGrpSpPr>
+      <p:grpSpPr>
+        <a:xfrm>
+          <a:off x="0" y="0"/>
+          <a:ext cx="0" cy="0"/>
+          <a:chOff x="0" y="0"/>
+          <a:chExt cx="0" cy="0"/>
+        </a:xfrm>
+      </p:grpSpPr>
+      <p:sp>
+        <p:nvSpPr>
+          <p:cNvPr id="2" name="Text 0"/>
+          <p:cNvSpPr/>
+          <p:nvPr/>
+        </p:nvSpPr>
+        <p:spPr>
+          <a:xfrm>
+            <a:off x="0" y="0"/>
+            <a:ext cx="9144000" cy="101501"/>
+          </a:xfrm>
+          <a:prstGeom prst="rect">
+            <a:avLst/>
+          </a:prstGeom>
+          <a:solidFill>
+            <a:srgbClr val="5D1D2E"/>
+          </a:solidFill>
+          <a:ln/>
+        </p:spPr>
+        <p:txBody>
+          <a:bodyPr wrap="square" rtlCol="0" anchor="ctr"/>
+          <a:lstStyle/>
+          <a:p>
+            <a:pPr indent="0" marL="0">
+              <a:buNone/>
+            </a:pPr>
+            <a:endParaRPr lang="en-US" dirty="0"/>
+          </a:p>
+        </p:txBody>
+      </p:sp>
+      <p:sp>
+        <p:nvSpPr>
+          <p:cNvPr id="3" name="Text 1"/>
+          <p:cNvSpPr/>
+          <p:nvPr/>
+        </p:nvSpPr>
+        <p:spPr>
+          <a:xfrm>
+            <a:off x="406301" y="457051"/>
+            <a:ext cx="8498026" cy="274290"/>
+          </a:xfrm>
+          <a:prstGeom prst="rect">
+            <a:avLst/>
+          </a:prstGeom>
+          <a:noFill/>
+          <a:ln/>
+        </p:spPr>
+        <p:txBody>
+          <a:bodyPr wrap="square" lIns="0" tIns="0" rIns="0" bIns="0" rtlCol="0" anchor="t"/>
+          <a:lstStyle/>
+          <a:p>
+            <a:pPr algn="l" indent="0" marL="0">
+              <a:lnSpc>
+                <a:spcPts val="2160"/>
+              </a:lnSpc>
+              <a:spcBef>
+                <a:spcPts val="600"/>
+              </a:spcBef>
+              <a:spcAft>
+                <a:spcPts val="800"/>
+              </a:spcAft>
+              <a:buNone/>
+            </a:pPr>
+            <a:r>
+              <a:rPr lang="en-US" sz="1800" b="1" dirty="0">
+                <a:solidFill>
+                  <a:srgbClr val="997929"/>
+                </a:solidFill>
+                <a:latin typeface="Times New Roman" pitchFamily="34" charset="0"/>
+                <a:ea typeface="Times New Roman" pitchFamily="34" charset="-122"/>
+                <a:cs typeface="Times New Roman" pitchFamily="34" charset="-120"/>
+              </a:rPr>
+              <a:t>Teacher notes</a:t>
+            </a:r>
+            <a:endParaRPr lang="en-US" sz="1800" dirty="0"/>
+          </a:p>
+        </p:txBody>
+      </p:sp>
+      <p:sp>
+        <p:nvSpPr>
+          <p:cNvPr id="4" name="Text 2"/>
+          <p:cNvSpPr/>
+          <p:nvPr/>
+        </p:nvSpPr>
+        <p:spPr>
+          <a:xfrm>
+            <a:off x="634901" y="883593"/>
+            <a:ext cx="8102798" cy="731341"/>
+          </a:xfrm>
+          <a:prstGeom prst="rect">
+            <a:avLst/>
+          </a:prstGeom>
+          <a:noFill/>
+          <a:ln/>
+        </p:spPr>
+        <p:txBody>
+          <a:bodyPr wrap="square" lIns="0" tIns="0" rIns="0" bIns="0" rtlCol="0" anchor="t"/>
+          <a:lstStyle/>
+          <a:p>
+            <a:pPr algn="l" marL="342900" indent="-342900">
+              <a:lnSpc>
+                <a:spcPts val="1620"/>
+              </a:lnSpc>
+              <a:spcAft>
+                <a:spcPts val="300"/>
+              </a:spcAft>
+              <a:buSzPct val="100000"/>
+              <a:buChar char="•"/>
+            </a:pPr>
+            <a:r>
+              <a:rPr lang="en-US" sz="1200" dirty="0">
+                <a:solidFill>
+                  <a:srgbClr val="1A1A1A"/>
+                </a:solidFill>
+                <a:latin typeface="Georgia" pitchFamily="34" charset="0"/>
+                <a:ea typeface="Georgia" pitchFamily="34" charset="-122"/>
+                <a:cs typeface="Georgia" pitchFamily="34" charset="-120"/>
+              </a:rPr>
+              <a:t>Don't let "modern science is just objectively right" be the resting position. Push: "what does objectively right </a:t>
+            </a:r>
+            <a:pPr algn="l" indent="0" marL="0">
+              <a:lnSpc>
+                <a:spcPts val="1620"/>
+              </a:lnSpc>
+              <a:spcAft>
+                <a:spcPts val="300"/>
+              </a:spcAft>
+              <a:buNone/>
+            </a:pPr>
+            <a:r>
+              <a:rPr lang="en-US" sz="1200" i="1" dirty="0">
+                <a:solidFill>
+                  <a:srgbClr val="1A1A1A"/>
+                </a:solidFill>
+                <a:latin typeface="Georgia" pitchFamily="34" charset="0"/>
+                <a:ea typeface="Georgia" pitchFamily="34" charset="-122"/>
+                <a:cs typeface="Georgia" pitchFamily="34" charset="-120"/>
+              </a:rPr>
+              <a:t>mean</a:t>
+            </a:r>
+            <a:pPr algn="l" indent="0" marL="0">
+              <a:lnSpc>
+                <a:spcPts val="1620"/>
+              </a:lnSpc>
+              <a:spcAft>
+                <a:spcPts val="300"/>
+              </a:spcAft>
+              <a:buNone/>
+            </a:pPr>
+            <a:r>
+              <a:rPr lang="en-US" sz="1200" dirty="0">
+                <a:solidFill>
+                  <a:srgbClr val="1A1A1A"/>
+                </a:solidFill>
+                <a:latin typeface="Georgia" pitchFamily="34" charset="0"/>
+                <a:ea typeface="Georgia" pitchFamily="34" charset="-122"/>
+                <a:cs typeface="Georgia" pitchFamily="34" charset="-120"/>
+              </a:rPr>
+              <a:t>? Predictive accuracy? Comprehensiveness? Explanatory power?"</a:t>
+            </a:r>
+            <a:endParaRPr lang="en-US" sz="1200" dirty="0"/>
+          </a:p>
+          <a:p>
+            <a:pPr algn="l" marL="342900" indent="-342900">
+              <a:lnSpc>
+                <a:spcPts val="1620"/>
+              </a:lnSpc>
+              <a:spcAft>
+                <a:spcPts val="300"/>
+              </a:spcAft>
+              <a:buSzPct val="100000"/>
+              <a:buChar char="•"/>
+            </a:pPr>
+            <a:r>
+              <a:rPr lang="en-US" sz="1200" dirty="0">
+                <a:solidFill>
+                  <a:srgbClr val="1A1A1A"/>
+                </a:solidFill>
+                <a:latin typeface="Georgia" pitchFamily="34" charset="0"/>
+                <a:ea typeface="Georgia" pitchFamily="34" charset="-122"/>
+                <a:cs typeface="Georgia" pitchFamily="34" charset="-120"/>
+              </a:rPr>
+              <a:t>This module is about </a:t>
+            </a:r>
+            <a:pPr algn="l" indent="0" marL="0">
+              <a:lnSpc>
+                <a:spcPts val="1620"/>
+              </a:lnSpc>
+              <a:spcAft>
+                <a:spcPts val="300"/>
+              </a:spcAft>
+              <a:buNone/>
+            </a:pPr>
+            <a:r>
+              <a:rPr lang="en-US" sz="1200" i="1" dirty="0">
+                <a:solidFill>
+                  <a:srgbClr val="1A1A1A"/>
+                </a:solidFill>
+                <a:latin typeface="Georgia" pitchFamily="34" charset="0"/>
+                <a:ea typeface="Georgia" pitchFamily="34" charset="-122"/>
+                <a:cs typeface="Georgia" pitchFamily="34" charset="-120"/>
+              </a:rPr>
+              <a:t>intellectual honesty across frameworks</a:t>
+            </a:r>
+            <a:pPr algn="l" indent="0" marL="0">
+              <a:lnSpc>
+                <a:spcPts val="1620"/>
+              </a:lnSpc>
+              <a:spcAft>
+                <a:spcPts val="300"/>
+              </a:spcAft>
+              <a:buNone/>
+            </a:pPr>
+            <a:r>
+              <a:rPr lang="en-US" sz="1200" dirty="0">
+                <a:solidFill>
+                  <a:srgbClr val="1A1A1A"/>
+                </a:solidFill>
+                <a:latin typeface="Georgia" pitchFamily="34" charset="0"/>
+                <a:ea typeface="Georgia" pitchFamily="34" charset="-122"/>
+                <a:cs typeface="Georgia" pitchFamily="34" charset="-120"/>
+              </a:rPr>
+              <a:t>, not about advocacy for any one of them.</a:t>
+            </a:r>
+            <a:endParaRPr lang="en-US" sz="1200" dirty="0"/>
+          </a:p>
+        </p:txBody>
+      </p:sp>
+      <p:sp>
+        <p:nvSpPr>
+          <p:cNvPr id="5" name="Text 3"/>
+          <p:cNvSpPr/>
+          <p:nvPr/>
+        </p:nvSpPr>
+        <p:spPr>
+          <a:xfrm>
+            <a:off x="406301" y="4434929"/>
+            <a:ext cx="8498026" cy="213271"/>
+          </a:xfrm>
+          <a:prstGeom prst="rect">
+            <a:avLst/>
+          </a:prstGeom>
+          <a:noFill/>
+          <a:ln/>
+        </p:spPr>
+        <p:txBody>
+          <a:bodyPr wrap="square" lIns="0" tIns="0" rIns="0" bIns="0" rtlCol="0" anchor="t"/>
+          <a:lstStyle/>
+          <a:p>
+            <a:pPr algn="l" indent="0" marL="0">
+              <a:lnSpc>
+                <a:spcPts val="1680"/>
+              </a:lnSpc>
+              <a:spcBef>
+                <a:spcPts val="300"/>
+              </a:spcBef>
+              <a:spcAft>
+                <a:spcPts val="300"/>
+              </a:spcAft>
+              <a:buNone/>
+            </a:pPr>
+            <a:r>
+              <a:rPr lang="en-US" sz="1200" dirty="0">
+                <a:solidFill>
+                  <a:srgbClr val="1A1A1A"/>
+                </a:solidFill>
+                <a:latin typeface="Georgia" pitchFamily="34" charset="0"/>
+                <a:ea typeface="Georgia" pitchFamily="34" charset="-122"/>
+                <a:cs typeface="Georgia" pitchFamily="34" charset="-120"/>
+              </a:rPr>
+              <a:t>Senior ·  · IKS Curriculum</a:t>
+            </a:r>
+            <a:endParaRPr lang="en-US" sz="1200" dirty="0"/>
+          </a:p>
+        </p:txBody>
+      </p:sp>
+    </p:spTree>
+  </p:cSld>
+  <p:clrMapOvr>
+    <a:masterClrMapping/>
+  </p:clrMapOvr>
+</p:sld>
+</file>
+
+<file path=ppt/slides/slide14.xml><?xml version="1.0" encoding="utf-8"?>
+<p:sld xmlns:a="http://schemas.openxmlformats.org/drawingml/2006/main" xmlns:r="http://schemas.openxmlformats.org/officeDocument/2006/relationships" xmlns:p="http://schemas.openxmlformats.org/presentationml/2006/main">
+  <p:cSld name="Slide 14">
+    <p:bg>
+      <p:bgPr>
+        <a:solidFill>
+          <a:srgbClr val="FAF7F2"/>
+        </a:solidFill>
+      </p:bgPr>
+    </p:bg>
+    <p:spTree>
+      <p:nvGrpSpPr>
+        <p:cNvPr id="1" name=""/>
+        <p:cNvGrpSpPr/>
+        <p:nvPr/>
+      </p:nvGrpSpPr>
+      <p:grpSpPr>
+        <a:xfrm>
+          <a:off x="0" y="0"/>
+          <a:ext cx="0" cy="0"/>
+          <a:chOff x="0" y="0"/>
+          <a:chExt cx="0" cy="0"/>
+        </a:xfrm>
+      </p:grpSpPr>
+      <p:sp>
+        <p:nvSpPr>
+          <p:cNvPr id="2" name="Text 0"/>
+          <p:cNvSpPr/>
+          <p:nvPr/>
+        </p:nvSpPr>
+        <p:spPr>
+          <a:xfrm>
+            <a:off x="0" y="0"/>
+            <a:ext cx="9144000" cy="101501"/>
+          </a:xfrm>
+          <a:prstGeom prst="rect">
+            <a:avLst/>
+          </a:prstGeom>
+          <a:solidFill>
+            <a:srgbClr val="5D1D2E"/>
+          </a:solidFill>
+          <a:ln/>
+        </p:spPr>
+        <p:txBody>
+          <a:bodyPr wrap="square" rtlCol="0" anchor="ctr"/>
+          <a:lstStyle/>
+          <a:p>
+            <a:pPr indent="0" marL="0">
+              <a:buNone/>
+            </a:pPr>
+            <a:endParaRPr lang="en-US" dirty="0"/>
+          </a:p>
+        </p:txBody>
+      </p:sp>
+      <p:sp>
+        <p:nvSpPr>
+          <p:cNvPr id="3" name="Text 1"/>
+          <p:cNvSpPr/>
+          <p:nvPr/>
+        </p:nvSpPr>
+        <p:spPr>
+          <a:xfrm>
+            <a:off x="406301" y="457051"/>
+            <a:ext cx="8498026" cy="274290"/>
+          </a:xfrm>
+          <a:prstGeom prst="rect">
+            <a:avLst/>
+          </a:prstGeom>
+          <a:noFill/>
+          <a:ln/>
+        </p:spPr>
+        <p:txBody>
+          <a:bodyPr wrap="square" lIns="0" tIns="0" rIns="0" bIns="0" rtlCol="0" anchor="t"/>
+          <a:lstStyle/>
+          <a:p>
+            <a:pPr algn="l" indent="0" marL="0">
+              <a:lnSpc>
+                <a:spcPts val="2160"/>
+              </a:lnSpc>
+              <a:spcBef>
+                <a:spcPts val="600"/>
+              </a:spcBef>
+              <a:spcAft>
+                <a:spcPts val="800"/>
+              </a:spcAft>
+              <a:buNone/>
+            </a:pPr>
+            <a:r>
+              <a:rPr lang="en-US" sz="1800" b="1" dirty="0">
+                <a:solidFill>
+                  <a:srgbClr val="997929"/>
+                </a:solidFill>
+                <a:latin typeface="Times New Roman" pitchFamily="34" charset="0"/>
+                <a:ea typeface="Times New Roman" pitchFamily="34" charset="-122"/>
+                <a:cs typeface="Times New Roman" pitchFamily="34" charset="-120"/>
+              </a:rPr>
+              <a:t>Citation(s) used</a:t>
+            </a:r>
+            <a:endParaRPr lang="en-US" sz="1800" dirty="0"/>
+          </a:p>
+        </p:txBody>
+      </p:sp>
+      <p:sp>
+        <p:nvSpPr>
+          <p:cNvPr id="4" name="Text 2"/>
+          <p:cNvSpPr/>
+          <p:nvPr/>
+        </p:nvSpPr>
+        <p:spPr>
+          <a:xfrm>
+            <a:off x="634901" y="883593"/>
+            <a:ext cx="8102798" cy="300930"/>
+          </a:xfrm>
+          <a:prstGeom prst="rect">
+            <a:avLst/>
+          </a:prstGeom>
+          <a:noFill/>
+          <a:ln/>
+        </p:spPr>
+        <p:txBody>
+          <a:bodyPr wrap="square" lIns="0" tIns="0" rIns="0" bIns="0" rtlCol="0" anchor="t"/>
+          <a:lstStyle/>
+          <a:p>
+            <a:pPr algn="l" marL="342900" indent="-342900">
+              <a:lnSpc>
+                <a:spcPts val="1620"/>
+              </a:lnSpc>
+              <a:spcAft>
+                <a:spcPts val="300"/>
+              </a:spcAft>
+              <a:buSzPct val="100000"/>
+              <a:buChar char="•"/>
+            </a:pPr>
+            <a:r>
+              <a:rPr lang="en-US" sz="1200" dirty="0">
+                <a:solidFill>
+                  <a:srgbClr val="1A1A1A"/>
+                </a:solidFill>
+                <a:latin typeface="Georgia" pitchFamily="34" charset="0"/>
+                <a:ea typeface="Georgia" pitchFamily="34" charset="-122"/>
+                <a:cs typeface="Georgia" pitchFamily="34" charset="-120"/>
+              </a:rPr>
+              <a:t>SB 2.10.3 — vidya-karana RAG cache </a:t>
+            </a:r>
+            <a:pPr algn="l" indent="0" marL="0">
+              <a:lnSpc>
+                <a:spcPts val="1620"/>
+              </a:lnSpc>
               <a:spcAft>
                 <a:spcPts val="300"/>
               </a:spcAft>
@@ -2345,7 +3803,7 @@
                 <a:ea typeface="Times New Roman" pitchFamily="34" charset="-122"/>
                 <a:cs typeface="Times New Roman" pitchFamily="34" charset="-120"/>
               </a:rPr>
-              <a:t>Materials</a:t>
+              <a:t>Learning objective</a:t>
             </a:r>
             <a:endParaRPr lang="en-US" sz="1800" dirty="0"/>
           </a:p>
@@ -2393,7 +3851,7 @@
                 <a:ea typeface="Georgia" pitchFamily="34" charset="-122"/>
                 <a:cs typeface="Georgia" pitchFamily="34" charset="-120"/>
               </a:rPr>
-              <a:t>– Whiteboard – Periodic table poster – Printed copy of SB 2.10.3 with IAST + translation (from cache)</a:t>
+              <a:t>Students articulate what "categorising matter" means and identify three distinct historical frameworks for doing it.</a:t>
             </a:r>
             <a:endParaRPr lang="en-US" sz="1200" dirty="0"/>
           </a:p>
@@ -2551,7 +4009,7 @@
                 <a:ea typeface="Times New Roman" pitchFamily="34" charset="-122"/>
                 <a:cs typeface="Times New Roman" pitchFamily="34" charset="-120"/>
               </a:rPr>
-              <a:t>Flow</a:t>
+              <a:t>Materials</a:t>
             </a:r>
             <a:endParaRPr lang="en-US" sz="1800" dirty="0"/>
           </a:p>
@@ -2560,6 +4018,100 @@
       <p:sp>
         <p:nvSpPr>
           <p:cNvPr id="4" name="Text 2"/>
+          <p:cNvSpPr/>
+          <p:nvPr/>
+        </p:nvSpPr>
+        <p:spPr>
+          <a:xfrm>
+            <a:off x="634901" y="883593"/>
+            <a:ext cx="8102798" cy="769441"/>
+          </a:xfrm>
+          <a:prstGeom prst="rect">
+            <a:avLst/>
+          </a:prstGeom>
+          <a:noFill/>
+          <a:ln/>
+        </p:spPr>
+        <p:txBody>
+          <a:bodyPr wrap="square" lIns="0" tIns="0" rIns="0" bIns="0" rtlCol="0" anchor="t"/>
+          <a:lstStyle/>
+          <a:p>
+            <a:pPr algn="l" marL="342900" indent="-342900">
+              <a:lnSpc>
+                <a:spcPts val="1620"/>
+              </a:lnSpc>
+              <a:spcAft>
+                <a:spcPts val="300"/>
+              </a:spcAft>
+              <a:buSzPct val="100000"/>
+              <a:buChar char="•"/>
+            </a:pPr>
+            <a:r>
+              <a:rPr lang="en-US" sz="1200" dirty="0">
+                <a:solidFill>
+                  <a:srgbClr val="1A1A1A"/>
+                </a:solidFill>
+                <a:latin typeface="Georgia" pitchFamily="34" charset="0"/>
+                <a:ea typeface="Georgia" pitchFamily="34" charset="-122"/>
+                <a:cs typeface="Georgia" pitchFamily="34" charset="-120"/>
+              </a:rPr>
+              <a:t>Whiteboard</a:t>
+            </a:r>
+            <a:endParaRPr lang="en-US" sz="1200" dirty="0"/>
+          </a:p>
+          <a:p>
+            <a:pPr algn="l" marL="342900" indent="-342900">
+              <a:lnSpc>
+                <a:spcPts val="1620"/>
+              </a:lnSpc>
+              <a:spcAft>
+                <a:spcPts val="300"/>
+              </a:spcAft>
+              <a:buSzPct val="100000"/>
+              <a:buChar char="•"/>
+            </a:pPr>
+            <a:r>
+              <a:rPr lang="en-US" sz="1200" dirty="0">
+                <a:solidFill>
+                  <a:srgbClr val="1A1A1A"/>
+                </a:solidFill>
+                <a:latin typeface="Georgia" pitchFamily="34" charset="0"/>
+                <a:ea typeface="Georgia" pitchFamily="34" charset="-122"/>
+                <a:cs typeface="Georgia" pitchFamily="34" charset="-120"/>
+              </a:rPr>
+              <a:t>Periodic table poster</a:t>
+            </a:r>
+            <a:endParaRPr lang="en-US" sz="1200" dirty="0"/>
+          </a:p>
+          <a:p>
+            <a:pPr algn="l" marL="342900" indent="-342900">
+              <a:lnSpc>
+                <a:spcPts val="1620"/>
+              </a:lnSpc>
+              <a:spcAft>
+                <a:spcPts val="300"/>
+              </a:spcAft>
+              <a:buSzPct val="100000"/>
+              <a:buChar char="•"/>
+            </a:pPr>
+            <a:r>
+              <a:rPr lang="en-US" sz="1200" dirty="0">
+                <a:solidFill>
+                  <a:srgbClr val="1A1A1A"/>
+                </a:solidFill>
+                <a:latin typeface="Georgia" pitchFamily="34" charset="0"/>
+                <a:ea typeface="Georgia" pitchFamily="34" charset="-122"/>
+                <a:cs typeface="Georgia" pitchFamily="34" charset="-120"/>
+              </a:rPr>
+              <a:t>Printed copy of SB 2.10.3 with IAST + translation (from cache)</a:t>
+            </a:r>
+            <a:endParaRPr lang="en-US" sz="1200" dirty="0"/>
+          </a:p>
+        </p:txBody>
+      </p:sp>
+      <p:sp>
+        <p:nvSpPr>
+          <p:cNvPr id="5" name="Text 3"/>
           <p:cNvSpPr/>
           <p:nvPr/>
         </p:nvSpPr>
@@ -2709,7 +4261,7 @@
                 <a:ea typeface="Times New Roman" pitchFamily="34" charset="-122"/>
                 <a:cs typeface="Times New Roman" pitchFamily="34" charset="-120"/>
               </a:rPr>
-              <a:t>Warm-up (5 min)</a:t>
+              <a:t>Flow</a:t>
             </a:r>
             <a:endParaRPr lang="en-US" sz="1800" dirty="0"/>
           </a:p>
@@ -2718,125 +4270,6 @@
       <p:sp>
         <p:nvSpPr>
           <p:cNvPr id="4" name="Text 2"/>
-          <p:cNvSpPr/>
-          <p:nvPr/>
-        </p:nvSpPr>
-        <p:spPr>
-          <a:xfrm>
-            <a:off x="406301" y="870942"/>
-            <a:ext cx="8498026" cy="213271"/>
-          </a:xfrm>
-          <a:prstGeom prst="rect">
-            <a:avLst/>
-          </a:prstGeom>
-          <a:noFill/>
-          <a:ln/>
-        </p:spPr>
-        <p:txBody>
-          <a:bodyPr wrap="square" lIns="0" tIns="0" rIns="0" bIns="0" rtlCol="0" anchor="t"/>
-          <a:lstStyle/>
-          <a:p>
-            <a:pPr algn="l" indent="0" marL="0">
-              <a:lnSpc>
-                <a:spcPts val="1680"/>
-              </a:lnSpc>
-              <a:spcBef>
-                <a:spcPts val="300"/>
-              </a:spcBef>
-              <a:spcAft>
-                <a:spcPts val="300"/>
-              </a:spcAft>
-              <a:buNone/>
-            </a:pPr>
-            <a:r>
-              <a:rPr lang="en-US" sz="1200" dirty="0">
-                <a:solidFill>
-                  <a:srgbClr val="1A1A1A"/>
-                </a:solidFill>
-                <a:latin typeface="Georgia" pitchFamily="34" charset="0"/>
-                <a:ea typeface="Georgia" pitchFamily="34" charset="-122"/>
-                <a:cs typeface="Georgia" pitchFamily="34" charset="-120"/>
-              </a:rPr>
-              <a:t>Opening provocation on board: </a:t>
-            </a:r>
-            <a:pPr algn="l" indent="0" marL="0">
-              <a:lnSpc>
-                <a:spcPts val="1680"/>
-              </a:lnSpc>
-              <a:spcBef>
-                <a:spcPts val="300"/>
-              </a:spcBef>
-              <a:spcAft>
-                <a:spcPts val="300"/>
-              </a:spcAft>
-              <a:buNone/>
-            </a:pPr>
-            <a:r>
-              <a:rPr lang="en-US" sz="1200" i="1" dirty="0">
-                <a:solidFill>
-                  <a:srgbClr val="1A1A1A"/>
-                </a:solidFill>
-                <a:latin typeface="Georgia" pitchFamily="34" charset="0"/>
-                <a:ea typeface="Georgia" pitchFamily="34" charset="-122"/>
-                <a:cs typeface="Georgia" pitchFamily="34" charset="-120"/>
-              </a:rPr>
-              <a:t>"Categories are not in nature. Categories are imposed on nature. Discuss."</a:t>
-            </a:r>
-            <a:endParaRPr lang="en-US" sz="1200" dirty="0"/>
-          </a:p>
-        </p:txBody>
-      </p:sp>
-      <p:sp>
-        <p:nvSpPr>
-          <p:cNvPr id="5" name="Text 3"/>
-          <p:cNvSpPr/>
-          <p:nvPr/>
-        </p:nvSpPr>
-        <p:spPr>
-          <a:xfrm>
-            <a:off x="406301" y="1160413"/>
-            <a:ext cx="8498026" cy="213271"/>
-          </a:xfrm>
-          <a:prstGeom prst="rect">
-            <a:avLst/>
-          </a:prstGeom>
-          <a:noFill/>
-          <a:ln/>
-        </p:spPr>
-        <p:txBody>
-          <a:bodyPr wrap="square" lIns="0" tIns="0" rIns="0" bIns="0" rtlCol="0" anchor="t"/>
-          <a:lstStyle/>
-          <a:p>
-            <a:pPr algn="l" indent="0" marL="0">
-              <a:lnSpc>
-                <a:spcPts val="1680"/>
-              </a:lnSpc>
-              <a:spcBef>
-                <a:spcPts val="300"/>
-              </a:spcBef>
-              <a:spcAft>
-                <a:spcPts val="300"/>
-              </a:spcAft>
-              <a:buNone/>
-            </a:pPr>
-            <a:r>
-              <a:rPr lang="en-US" sz="1200" dirty="0">
-                <a:solidFill>
-                  <a:srgbClr val="1A1A1A"/>
-                </a:solidFill>
-                <a:latin typeface="Georgia" pitchFamily="34" charset="0"/>
-                <a:ea typeface="Georgia" pitchFamily="34" charset="-122"/>
-                <a:cs typeface="Georgia" pitchFamily="34" charset="-120"/>
-              </a:rPr>
-              <a:t>Take 3 student responses.</a:t>
-            </a:r>
-            <a:endParaRPr lang="en-US" sz="1200" dirty="0"/>
-          </a:p>
-        </p:txBody>
-      </p:sp>
-      <p:sp>
-        <p:nvSpPr>
-          <p:cNvPr id="6" name="Text 4"/>
           <p:cNvSpPr/>
           <p:nvPr/>
         </p:nvSpPr>
@@ -2986,7 +4419,7 @@
                 <a:ea typeface="Times New Roman" pitchFamily="34" charset="-122"/>
                 <a:cs typeface="Times New Roman" pitchFamily="34" charset="-120"/>
               </a:rPr>
-              <a:t>Core (25 min)</a:t>
+              <a:t>Warm-up (5 min)</a:t>
             </a:r>
             <a:endParaRPr lang="en-US" sz="1800" dirty="0"/>
           </a:p>
@@ -3000,8 +4433,8 @@
         </p:nvSpPr>
         <p:spPr>
           <a:xfrm>
-            <a:off x="634901" y="883593"/>
-            <a:ext cx="8102798" cy="281880"/>
+            <a:off x="406301" y="870942"/>
+            <a:ext cx="8498026" cy="213271"/>
           </a:xfrm>
           <a:prstGeom prst="rect">
             <a:avLst/>
@@ -3013,31 +4446,13 @@
           <a:bodyPr wrap="square" lIns="0" tIns="0" rIns="0" bIns="0" rtlCol="0" anchor="t"/>
           <a:lstStyle/>
           <a:p>
-            <a:pPr algn="l" marL="342900" indent="-342900">
-              <a:lnSpc>
-                <a:spcPts val="1620"/>
-              </a:lnSpc>
-              <a:spcAft>
-                <a:spcPts val="300"/>
-              </a:spcAft>
-              <a:buSzPct val="100000"/>
-              <a:buChar char="•"/>
-            </a:pPr>
-            <a:r>
-              <a:rPr lang="en-US" sz="1200" b="1" dirty="0">
-                <a:solidFill>
-                  <a:srgbClr val="1A1A1A"/>
-                </a:solidFill>
-                <a:latin typeface="Georgia" pitchFamily="34" charset="0"/>
-                <a:ea typeface="Georgia" pitchFamily="34" charset="-122"/>
-                <a:cs typeface="Georgia" pitchFamily="34" charset="-120"/>
-              </a:rPr>
-              <a:t>Three frameworks, one question.</a:t>
-            </a:r>
-            <a:pPr algn="l" indent="0" marL="0">
-              <a:lnSpc>
-                <a:spcPts val="1620"/>
-              </a:lnSpc>
+            <a:pPr algn="l" indent="0" marL="0">
+              <a:lnSpc>
+                <a:spcPts val="1680"/>
+              </a:lnSpc>
+              <a:spcBef>
+                <a:spcPts val="300"/>
+              </a:spcBef>
               <a:spcAft>
                 <a:spcPts val="300"/>
               </a:spcAft>
@@ -3052,7 +4467,30 @@
                 <a:ea typeface="Georgia" pitchFamily="34" charset="-122"/>
                 <a:cs typeface="Georgia" pitchFamily="34" charset="-120"/>
               </a:rPr>
-              <a:t> Write on board:</a:t>
+              <a:t>Opening provocation on board: </a:t>
+            </a:r>
+            <a:pPr algn="l" indent="0" marL="0">
+              <a:lnSpc>
+                <a:spcPts val="1680"/>
+              </a:lnSpc>
+              <a:spcBef>
+                <a:spcPts val="300"/>
+              </a:spcBef>
+              <a:spcAft>
+                <a:spcPts val="300"/>
+              </a:spcAft>
+              <a:buNone/>
+            </a:pPr>
+            <a:r>
+              <a:rPr lang="en-US" sz="1200" i="1" dirty="0">
+                <a:solidFill>
+                  <a:srgbClr val="1A1A1A"/>
+                </a:solidFill>
+                <a:latin typeface="Georgia" pitchFamily="34" charset="0"/>
+                <a:ea typeface="Georgia" pitchFamily="34" charset="-122"/>
+                <a:cs typeface="Georgia" pitchFamily="34" charset="-120"/>
+              </a:rPr>
+              <a:t>"Categories are not in nature. Categories are imposed on nature. Discuss."</a:t>
             </a:r>
             <a:endParaRPr lang="en-US" sz="1200" dirty="0"/>
           </a:p>
@@ -3066,7 +4504,7 @@
         </p:nvSpPr>
         <p:spPr>
           <a:xfrm>
-            <a:off x="406301" y="1254323"/>
+            <a:off x="406301" y="1160413"/>
             <a:ext cx="8498026" cy="213271"/>
           </a:xfrm>
           <a:prstGeom prst="rect">
@@ -3092,15 +4530,15 @@
               <a:buNone/>
             </a:pPr>
             <a:r>
-              <a:rPr lang="en-US" sz="1200" i="1" dirty="0">
-                <a:solidFill>
-                  <a:srgbClr val="1A1A1A"/>
-                </a:solidFill>
-                <a:latin typeface="Georgia" pitchFamily="34" charset="0"/>
-                <a:ea typeface="Georgia" pitchFamily="34" charset="-122"/>
-                <a:cs typeface="Georgia" pitchFamily="34" charset="-120"/>
-              </a:rPr>
-              <a:t>Each row: Framework · Approximate date · Categories.</a:t>
+              <a:rPr lang="en-US" sz="1200" dirty="0">
+                <a:solidFill>
+                  <a:srgbClr val="1A1A1A"/>
+                </a:solidFill>
+                <a:latin typeface="Georgia" pitchFamily="34" charset="0"/>
+                <a:ea typeface="Georgia" pitchFamily="34" charset="-122"/>
+                <a:cs typeface="Georgia" pitchFamily="34" charset="-120"/>
+              </a:rPr>
+              <a:t>Take 3 student responses.</a:t>
             </a:r>
             <a:endParaRPr lang="en-US" sz="1200" dirty="0"/>
           </a:p>
@@ -3114,590 +4552,7 @@
         </p:nvSpPr>
         <p:spPr>
           <a:xfrm>
-            <a:off x="634901" y="1556445"/>
-            <a:ext cx="8102798" cy="769441"/>
-          </a:xfrm>
-          <a:prstGeom prst="rect">
-            <a:avLst/>
-          </a:prstGeom>
-          <a:noFill/>
-          <a:ln/>
-        </p:spPr>
-        <p:txBody>
-          <a:bodyPr wrap="square" lIns="0" tIns="0" rIns="0" bIns="0" rtlCol="0" anchor="t"/>
-          <a:lstStyle/>
-          <a:p>
-            <a:pPr algn="l" marL="342900" indent="-342900">
-              <a:lnSpc>
-                <a:spcPts val="1620"/>
-              </a:lnSpc>
-              <a:spcAft>
-                <a:spcPts val="300"/>
-              </a:spcAft>
-              <a:buSzPct val="100000"/>
-              <a:buChar char="•"/>
-            </a:pPr>
-            <a:r>
-              <a:rPr lang="en-US" sz="1200" b="1" dirty="0">
-                <a:solidFill>
-                  <a:srgbClr val="1A1A1A"/>
-                </a:solidFill>
-                <a:latin typeface="Georgia" pitchFamily="34" charset="0"/>
-                <a:ea typeface="Georgia" pitchFamily="34" charset="-122"/>
-                <a:cs typeface="Georgia" pitchFamily="34" charset="-120"/>
-              </a:rPr>
-              <a:t>Greek (Empedocles, Aristotle)</a:t>
-            </a:r>
-            <a:pPr algn="l" indent="0" marL="0">
-              <a:lnSpc>
-                <a:spcPts val="1620"/>
-              </a:lnSpc>
-              <a:spcAft>
-                <a:spcPts val="300"/>
-              </a:spcAft>
-              <a:buNone/>
-            </a:pPr>
-            <a:r>
-              <a:rPr lang="en-US" sz="1200" dirty="0">
-                <a:solidFill>
-                  <a:srgbClr val="1A1A1A"/>
-                </a:solidFill>
-                <a:latin typeface="Georgia" pitchFamily="34" charset="0"/>
-                <a:ea typeface="Georgia" pitchFamily="34" charset="-122"/>
-                <a:cs typeface="Georgia" pitchFamily="34" charset="-120"/>
-              </a:rPr>
-              <a:t> — 5th c. BCE → 4th c. BCE · 4 + 1 (quintessence)</a:t>
-            </a:r>
-            <a:endParaRPr lang="en-US" sz="1200" dirty="0"/>
-          </a:p>
-          <a:p>
-            <a:pPr algn="l" marL="342900" indent="-342900">
-              <a:lnSpc>
-                <a:spcPts val="1620"/>
-              </a:lnSpc>
-              <a:spcAft>
-                <a:spcPts val="300"/>
-              </a:spcAft>
-              <a:buSzPct val="100000"/>
-              <a:buChar char="•"/>
-            </a:pPr>
-            <a:r>
-              <a:rPr lang="en-US" sz="1200" b="1" dirty="0">
-                <a:solidFill>
-                  <a:srgbClr val="1A1A1A"/>
-                </a:solidFill>
-                <a:latin typeface="Georgia" pitchFamily="34" charset="0"/>
-                <a:ea typeface="Georgia" pitchFamily="34" charset="-122"/>
-                <a:cs typeface="Georgia" pitchFamily="34" charset="-120"/>
-              </a:rPr>
-              <a:t>Sāṅkhya (India)</a:t>
-            </a:r>
-            <a:pPr algn="l" indent="0" marL="0">
-              <a:lnSpc>
-                <a:spcPts val="1620"/>
-              </a:lnSpc>
-              <a:spcAft>
-                <a:spcPts val="300"/>
-              </a:spcAft>
-              <a:buNone/>
-            </a:pPr>
-            <a:r>
-              <a:rPr lang="en-US" sz="1200" dirty="0">
-                <a:solidFill>
-                  <a:srgbClr val="1A1A1A"/>
-                </a:solidFill>
-                <a:latin typeface="Georgia" pitchFamily="34" charset="0"/>
-                <a:ea typeface="Georgia" pitchFamily="34" charset="-122"/>
-                <a:cs typeface="Georgia" pitchFamily="34" charset="-120"/>
-              </a:rPr>
-              <a:t> — likely pre-5th c. BCE, codified c. 4th c. CE · 25 tattvas (5 are bhūtas)</a:t>
-            </a:r>
-            <a:endParaRPr lang="en-US" sz="1200" dirty="0"/>
-          </a:p>
-          <a:p>
-            <a:pPr algn="l" marL="342900" indent="-342900">
-              <a:lnSpc>
-                <a:spcPts val="1620"/>
-              </a:lnSpc>
-              <a:spcAft>
-                <a:spcPts val="300"/>
-              </a:spcAft>
-              <a:buSzPct val="100000"/>
-              <a:buChar char="•"/>
-            </a:pPr>
-            <a:r>
-              <a:rPr lang="en-US" sz="1200" b="1" dirty="0">
-                <a:solidFill>
-                  <a:srgbClr val="1A1A1A"/>
-                </a:solidFill>
-                <a:latin typeface="Georgia" pitchFamily="34" charset="0"/>
-                <a:ea typeface="Georgia" pitchFamily="34" charset="-122"/>
-                <a:cs typeface="Georgia" pitchFamily="34" charset="-120"/>
-              </a:rPr>
-              <a:t>Modern periodic table</a:t>
-            </a:r>
-            <a:pPr algn="l" indent="0" marL="0">
-              <a:lnSpc>
-                <a:spcPts val="1620"/>
-              </a:lnSpc>
-              <a:spcAft>
-                <a:spcPts val="300"/>
-              </a:spcAft>
-              <a:buNone/>
-            </a:pPr>
-            <a:r>
-              <a:rPr lang="en-US" sz="1200" dirty="0">
-                <a:solidFill>
-                  <a:srgbClr val="1A1A1A"/>
-                </a:solidFill>
-                <a:latin typeface="Georgia" pitchFamily="34" charset="0"/>
-                <a:ea typeface="Georgia" pitchFamily="34" charset="-122"/>
-                <a:cs typeface="Georgia" pitchFamily="34" charset="-120"/>
-              </a:rPr>
-              <a:t> — 1869 (Mendeleev) → present · 118+ elements</a:t>
-            </a:r>
-            <a:endParaRPr lang="en-US" sz="1200" dirty="0"/>
-          </a:p>
-        </p:txBody>
-      </p:sp>
-      <p:sp>
-        <p:nvSpPr>
-          <p:cNvPr id="7" name="Text 5"/>
-          <p:cNvSpPr/>
-          <p:nvPr/>
-        </p:nvSpPr>
-        <p:spPr>
-          <a:xfrm>
-            <a:off x="634901" y="2427387"/>
-            <a:ext cx="8102798" cy="693241"/>
-          </a:xfrm>
-          <a:prstGeom prst="rect">
-            <a:avLst/>
-          </a:prstGeom>
-          <a:noFill/>
-          <a:ln/>
-        </p:spPr>
-        <p:txBody>
-          <a:bodyPr wrap="square" lIns="0" tIns="0" rIns="0" bIns="0" rtlCol="0" anchor="t"/>
-          <a:lstStyle/>
-          <a:p>
-            <a:pPr algn="l" marL="342900" indent="-342900">
-              <a:lnSpc>
-                <a:spcPts val="1620"/>
-              </a:lnSpc>
-              <a:spcAft>
-                <a:spcPts val="300"/>
-              </a:spcAft>
-              <a:buSzPct val="100000"/>
-              <a:buChar char="•"/>
-            </a:pPr>
-            <a:r>
-              <a:rPr lang="en-US" sz="1200" b="1" dirty="0">
-                <a:solidFill>
-                  <a:srgbClr val="1A1A1A"/>
-                </a:solidFill>
-                <a:latin typeface="Georgia" pitchFamily="34" charset="0"/>
-                <a:ea typeface="Georgia" pitchFamily="34" charset="-122"/>
-                <a:cs typeface="Georgia" pitchFamily="34" charset="-120"/>
-              </a:rPr>
-              <a:t>The persistent question:</a:t>
-            </a:r>
-            <a:pPr algn="l" indent="0" marL="0">
-              <a:lnSpc>
-                <a:spcPts val="1620"/>
-              </a:lnSpc>
-              <a:spcAft>
-                <a:spcPts val="300"/>
-              </a:spcAft>
-              <a:buNone/>
-            </a:pPr>
-            <a:r>
-              <a:rPr lang="en-US" sz="1200" dirty="0">
-                <a:solidFill>
-                  <a:srgbClr val="1A1A1A"/>
-                </a:solidFill>
-                <a:latin typeface="Georgia" pitchFamily="34" charset="0"/>
-                <a:ea typeface="Georgia" pitchFamily="34" charset="-122"/>
-                <a:cs typeface="Georgia" pitchFamily="34" charset="-120"/>
-              </a:rPr>
-              <a:t> </a:t>
-            </a:r>
-            <a:pPr algn="l" indent="0" marL="0">
-              <a:lnSpc>
-                <a:spcPts val="1620"/>
-              </a:lnSpc>
-              <a:spcAft>
-                <a:spcPts val="300"/>
-              </a:spcAft>
-              <a:buNone/>
-            </a:pPr>
-            <a:r>
-              <a:rPr lang="en-US" sz="1200" i="1" dirty="0">
-                <a:solidFill>
-                  <a:srgbClr val="1A1A1A"/>
-                </a:solidFill>
-                <a:latin typeface="Georgia" pitchFamily="34" charset="0"/>
-                <a:ea typeface="Georgia" pitchFamily="34" charset="-122"/>
-                <a:cs typeface="Georgia" pitchFamily="34" charset="-120"/>
-              </a:rPr>
-              <a:t>"What categories of stuff (and not-stuff) does the world come in?"</a:t>
-            </a:r>
-            <a:pPr algn="l" indent="0" marL="0">
-              <a:lnSpc>
-                <a:spcPts val="1620"/>
-              </a:lnSpc>
-              <a:spcAft>
-                <a:spcPts val="300"/>
-              </a:spcAft>
-              <a:buNone/>
-            </a:pPr>
-            <a:r>
-              <a:rPr lang="en-US" sz="1200" dirty="0">
-                <a:solidFill>
-                  <a:srgbClr val="1A1A1A"/>
-                </a:solidFill>
-                <a:latin typeface="Georgia" pitchFamily="34" charset="0"/>
-                <a:ea typeface="Georgia" pitchFamily="34" charset="-122"/>
-                <a:cs typeface="Georgia" pitchFamily="34" charset="-120"/>
-              </a:rPr>
-              <a:t> Every culture's natural philosophers tried to answer this. The answers differ because the methods differ and the questions are framed differently.</a:t>
-            </a:r>
-            <a:endParaRPr lang="en-US" sz="1200" dirty="0"/>
-          </a:p>
-        </p:txBody>
-      </p:sp>
-      <p:sp>
-        <p:nvSpPr>
-          <p:cNvPr id="8" name="Text 6"/>
-          <p:cNvSpPr/>
-          <p:nvPr/>
-        </p:nvSpPr>
-        <p:spPr>
-          <a:xfrm>
-            <a:off x="634901" y="3222129"/>
-            <a:ext cx="8102798" cy="281880"/>
-          </a:xfrm>
-          <a:prstGeom prst="rect">
-            <a:avLst/>
-          </a:prstGeom>
-          <a:noFill/>
-          <a:ln/>
-        </p:spPr>
-        <p:txBody>
-          <a:bodyPr wrap="square" lIns="0" tIns="0" rIns="0" bIns="0" rtlCol="0" anchor="t"/>
-          <a:lstStyle/>
-          <a:p>
-            <a:pPr algn="l" marL="342900" indent="-342900">
-              <a:lnSpc>
-                <a:spcPts val="1620"/>
-              </a:lnSpc>
-              <a:spcAft>
-                <a:spcPts val="300"/>
-              </a:spcAft>
-              <a:buSzPct val="100000"/>
-              <a:buChar char="•"/>
-            </a:pPr>
-            <a:r>
-              <a:rPr lang="en-US" sz="1200" b="1" dirty="0">
-                <a:solidFill>
-                  <a:srgbClr val="1A1A1A"/>
-                </a:solidFill>
-                <a:latin typeface="Georgia" pitchFamily="34" charset="0"/>
-                <a:ea typeface="Georgia" pitchFamily="34" charset="-122"/>
-                <a:cs typeface="Georgia" pitchFamily="34" charset="-120"/>
-              </a:rPr>
-              <a:t>Today's anchor verse — SB 2.10.3.</a:t>
-            </a:r>
-            <a:pPr algn="l" indent="0" marL="0">
-              <a:lnSpc>
-                <a:spcPts val="1620"/>
-              </a:lnSpc>
-              <a:spcAft>
-                <a:spcPts val="300"/>
-              </a:spcAft>
-              <a:buNone/>
-            </a:pPr>
-            <a:r>
-              <a:rPr lang="en-US" sz="1200" dirty="0">
-                <a:solidFill>
-                  <a:srgbClr val="1A1A1A"/>
-                </a:solidFill>
-                <a:latin typeface="Georgia" pitchFamily="34" charset="0"/>
-                <a:ea typeface="Georgia" pitchFamily="34" charset="-122"/>
-                <a:cs typeface="Georgia" pitchFamily="34" charset="-120"/>
-              </a:rPr>
-              <a:t> Read in IAST. Then translation:</a:t>
-            </a:r>
-            <a:endParaRPr lang="en-US" sz="1200" dirty="0"/>
-          </a:p>
-        </p:txBody>
-      </p:sp>
-      <p:sp>
-        <p:nvSpPr>
-          <p:cNvPr id="9" name="Text 7"/>
-          <p:cNvSpPr/>
-          <p:nvPr/>
-        </p:nvSpPr>
-        <p:spPr>
-          <a:xfrm>
-            <a:off x="406301" y="3592860"/>
-            <a:ext cx="8498026" cy="426541"/>
-          </a:xfrm>
-          <a:prstGeom prst="rect">
-            <a:avLst/>
-          </a:prstGeom>
-          <a:noFill/>
-          <a:ln/>
-        </p:spPr>
-        <p:txBody>
-          <a:bodyPr wrap="square" lIns="0" tIns="0" rIns="0" bIns="0" rtlCol="0" anchor="t"/>
-          <a:lstStyle/>
-          <a:p>
-            <a:pPr algn="l" indent="0" marL="0">
-              <a:lnSpc>
-                <a:spcPts val="1680"/>
-              </a:lnSpc>
-              <a:spcBef>
-                <a:spcPts val="300"/>
-              </a:spcBef>
-              <a:spcAft>
-                <a:spcPts val="300"/>
-              </a:spcAft>
-              <a:buNone/>
-            </a:pPr>
-            <a:r>
-              <a:rPr lang="en-US" sz="1200" dirty="0">
-                <a:solidFill>
-                  <a:srgbClr val="1A1A1A"/>
-                </a:solidFill>
-                <a:latin typeface="Georgia" pitchFamily="34" charset="0"/>
-                <a:ea typeface="Georgia" pitchFamily="34" charset="-122"/>
-                <a:cs typeface="Georgia" pitchFamily="34" charset="-120"/>
-              </a:rPr>
-              <a:t>&gt; "</a:t>
-            </a:r>
-            <a:pPr algn="l" indent="0" marL="0">
-              <a:lnSpc>
-                <a:spcPts val="1680"/>
-              </a:lnSpc>
-              <a:spcBef>
-                <a:spcPts val="300"/>
-              </a:spcBef>
-              <a:spcAft>
-                <a:spcPts val="300"/>
-              </a:spcAft>
-              <a:buNone/>
-            </a:pPr>
-            <a:r>
-              <a:rPr lang="en-US" sz="1200" i="1" dirty="0">
-                <a:solidFill>
-                  <a:srgbClr val="1A1A1A"/>
-                </a:solidFill>
-                <a:latin typeface="Georgia" pitchFamily="34" charset="0"/>
-                <a:ea typeface="Georgia" pitchFamily="34" charset="-122"/>
-                <a:cs typeface="Georgia" pitchFamily="34" charset="-120"/>
-              </a:rPr>
-              <a:t>bhūta-mātrendṛya-dhiyāṁ janma sarga udāhṛtaḥ ...</a:t>
-            </a:r>
-            <a:pPr algn="l" indent="0" marL="0">
-              <a:lnSpc>
-                <a:spcPts val="1680"/>
-              </a:lnSpc>
-              <a:spcBef>
-                <a:spcPts val="300"/>
-              </a:spcBef>
-              <a:spcAft>
-                <a:spcPts val="300"/>
-              </a:spcAft>
-              <a:buNone/>
-            </a:pPr>
-            <a:r>
-              <a:rPr lang="en-US" sz="1200" dirty="0">
-                <a:solidFill>
-                  <a:srgbClr val="1A1A1A"/>
-                </a:solidFill>
-                <a:latin typeface="Georgia" pitchFamily="34" charset="0"/>
-                <a:ea typeface="Georgia" pitchFamily="34" charset="-122"/>
-                <a:cs typeface="Georgia" pitchFamily="34" charset="-120"/>
-              </a:rPr>
-              <a:t>" &gt; "The manifestation of the gross elements, the senses, and the intellect is called creation (</a:t>
-            </a:r>
-            <a:pPr algn="l" indent="0" marL="0">
-              <a:lnSpc>
-                <a:spcPts val="1680"/>
-              </a:lnSpc>
-              <a:spcBef>
-                <a:spcPts val="300"/>
-              </a:spcBef>
-              <a:spcAft>
-                <a:spcPts val="300"/>
-              </a:spcAft>
-              <a:buNone/>
-            </a:pPr>
-            <a:r>
-              <a:rPr lang="en-US" sz="1200" i="1" dirty="0">
-                <a:solidFill>
-                  <a:srgbClr val="1A1A1A"/>
-                </a:solidFill>
-                <a:latin typeface="Georgia" pitchFamily="34" charset="0"/>
-                <a:ea typeface="Georgia" pitchFamily="34" charset="-122"/>
-                <a:cs typeface="Georgia" pitchFamily="34" charset="-120"/>
-              </a:rPr>
-              <a:t>sarga</a:t>
-            </a:r>
-            <a:pPr algn="l" indent="0" marL="0">
-              <a:lnSpc>
-                <a:spcPts val="1680"/>
-              </a:lnSpc>
-              <a:spcBef>
-                <a:spcPts val="300"/>
-              </a:spcBef>
-              <a:spcAft>
-                <a:spcPts val="300"/>
-              </a:spcAft>
-              <a:buNone/>
-            </a:pPr>
-            <a:r>
-              <a:rPr lang="en-US" sz="1200" dirty="0">
-                <a:solidFill>
-                  <a:srgbClr val="1A1A1A"/>
-                </a:solidFill>
-                <a:latin typeface="Georgia" pitchFamily="34" charset="0"/>
-                <a:ea typeface="Georgia" pitchFamily="34" charset="-122"/>
-                <a:cs typeface="Georgia" pitchFamily="34" charset="-120"/>
-              </a:rPr>
-              <a:t>)."</a:t>
-            </a:r>
-            <a:endParaRPr lang="en-US" sz="1200" dirty="0"/>
-          </a:p>
-        </p:txBody>
-      </p:sp>
-      <p:sp>
-        <p:nvSpPr>
-          <p:cNvPr id="10" name="Text 8"/>
-          <p:cNvSpPr/>
-          <p:nvPr/>
-        </p:nvSpPr>
-        <p:spPr>
-          <a:xfrm>
-            <a:off x="406301" y="4095601"/>
-            <a:ext cx="8498026" cy="639812"/>
-          </a:xfrm>
-          <a:prstGeom prst="rect">
-            <a:avLst/>
-          </a:prstGeom>
-          <a:noFill/>
-          <a:ln/>
-        </p:spPr>
-        <p:txBody>
-          <a:bodyPr wrap="square" lIns="0" tIns="0" rIns="0" bIns="0" rtlCol="0" anchor="t"/>
-          <a:lstStyle/>
-          <a:p>
-            <a:pPr algn="l" indent="0" marL="0">
-              <a:lnSpc>
-                <a:spcPts val="1680"/>
-              </a:lnSpc>
-              <a:spcBef>
-                <a:spcPts val="300"/>
-              </a:spcBef>
-              <a:spcAft>
-                <a:spcPts val="300"/>
-              </a:spcAft>
-              <a:buNone/>
-            </a:pPr>
-            <a:r>
-              <a:rPr lang="en-US" sz="1200" b="1" dirty="0">
-                <a:solidFill>
-                  <a:srgbClr val="1A1A1A"/>
-                </a:solidFill>
-                <a:latin typeface="Georgia" pitchFamily="34" charset="0"/>
-                <a:ea typeface="Georgia" pitchFamily="34" charset="-122"/>
-                <a:cs typeface="Georgia" pitchFamily="34" charset="-120"/>
-              </a:rPr>
-              <a:t>Note the move:</a:t>
-            </a:r>
-            <a:pPr algn="l" indent="0" marL="0">
-              <a:lnSpc>
-                <a:spcPts val="1680"/>
-              </a:lnSpc>
-              <a:spcBef>
-                <a:spcPts val="300"/>
-              </a:spcBef>
-              <a:spcAft>
-                <a:spcPts val="300"/>
-              </a:spcAft>
-              <a:buNone/>
-            </a:pPr>
-            <a:r>
-              <a:rPr lang="en-US" sz="1200" dirty="0">
-                <a:solidFill>
-                  <a:srgbClr val="1A1A1A"/>
-                </a:solidFill>
-                <a:latin typeface="Georgia" pitchFamily="34" charset="0"/>
-                <a:ea typeface="Georgia" pitchFamily="34" charset="-122"/>
-                <a:cs typeface="Georgia" pitchFamily="34" charset="-120"/>
-              </a:rPr>
-              <a:t> the Sāṅkhya verse names the bhūtas (elements), the indriyas (senses), and the dhī (intellect) as products of a single creation event. Modern science talks about atoms; Sāṅkhya talks about a unified scheme that includes the </a:t>
-            </a:r>
-            <a:pPr algn="l" indent="0" marL="0">
-              <a:lnSpc>
-                <a:spcPts val="1680"/>
-              </a:lnSpc>
-              <a:spcBef>
-                <a:spcPts val="300"/>
-              </a:spcBef>
-              <a:spcAft>
-                <a:spcPts val="300"/>
-              </a:spcAft>
-              <a:buNone/>
-            </a:pPr>
-            <a:r>
-              <a:rPr lang="en-US" sz="1200" i="1" dirty="0">
-                <a:solidFill>
-                  <a:srgbClr val="1A1A1A"/>
-                </a:solidFill>
-                <a:latin typeface="Georgia" pitchFamily="34" charset="0"/>
-                <a:ea typeface="Georgia" pitchFamily="34" charset="-122"/>
-                <a:cs typeface="Georgia" pitchFamily="34" charset="-120"/>
-              </a:rPr>
-              <a:t>perceiver</a:t>
-            </a:r>
-            <a:pPr algn="l" indent="0" marL="0">
-              <a:lnSpc>
-                <a:spcPts val="1680"/>
-              </a:lnSpc>
-              <a:spcBef>
-                <a:spcPts val="300"/>
-              </a:spcBef>
-              <a:spcAft>
-                <a:spcPts val="300"/>
-              </a:spcAft>
-              <a:buNone/>
-            </a:pPr>
-            <a:r>
-              <a:rPr lang="en-US" sz="1200" dirty="0">
-                <a:solidFill>
-                  <a:srgbClr val="1A1A1A"/>
-                </a:solidFill>
-                <a:latin typeface="Georgia" pitchFamily="34" charset="0"/>
-                <a:ea typeface="Georgia" pitchFamily="34" charset="-122"/>
-                <a:cs typeface="Georgia" pitchFamily="34" charset="-120"/>
-              </a:rPr>
-              <a:t>. This is a real structural difference, not just terminology.</a:t>
-            </a:r>
-            <a:endParaRPr lang="en-US" sz="1200" dirty="0"/>
-          </a:p>
-        </p:txBody>
-      </p:sp>
-      <p:sp>
-        <p:nvSpPr>
-          <p:cNvPr id="11" name="Text 9"/>
-          <p:cNvSpPr/>
-          <p:nvPr/>
-        </p:nvSpPr>
-        <p:spPr>
-          <a:xfrm>
-            <a:off x="406301" y="4887813"/>
+            <a:off x="406301" y="4434929"/>
             <a:ext cx="8498026" cy="213271"/>
           </a:xfrm>
           <a:prstGeom prst="rect">
@@ -3841,7 +4696,7 @@
                 <a:ea typeface="Times New Roman" pitchFamily="34" charset="-122"/>
                 <a:cs typeface="Times New Roman" pitchFamily="34" charset="-120"/>
               </a:rPr>
-              <a:t>Discussion (10 min)</a:t>
+              <a:t>Core (25 min)</a:t>
             </a:r>
             <a:endParaRPr lang="en-US" sz="1800" dirty="0"/>
           </a:p>
@@ -3855,8 +4710,8 @@
         </p:nvSpPr>
         <p:spPr>
           <a:xfrm>
-            <a:off x="406301" y="870942"/>
-            <a:ext cx="8498026" cy="213271"/>
+            <a:off x="634901" y="883593"/>
+            <a:ext cx="8102798" cy="281880"/>
           </a:xfrm>
           <a:prstGeom prst="rect">
             <a:avLst/>
@@ -3868,13 +4723,31 @@
           <a:bodyPr wrap="square" lIns="0" tIns="0" rIns="0" bIns="0" rtlCol="0" anchor="t"/>
           <a:lstStyle/>
           <a:p>
-            <a:pPr algn="l" indent="0" marL="0">
-              <a:lnSpc>
-                <a:spcPts val="1680"/>
-              </a:lnSpc>
-              <a:spcBef>
-                <a:spcPts val="300"/>
-              </a:spcBef>
+            <a:pPr algn="l" marL="342900" indent="-342900">
+              <a:lnSpc>
+                <a:spcPts val="1620"/>
+              </a:lnSpc>
+              <a:spcAft>
+                <a:spcPts val="300"/>
+              </a:spcAft>
+              <a:buSzPct val="100000"/>
+              <a:buChar char="•"/>
+            </a:pPr>
+            <a:r>
+              <a:rPr lang="en-US" sz="1200" b="1" dirty="0">
+                <a:solidFill>
+                  <a:srgbClr val="1A1A1A"/>
+                </a:solidFill>
+                <a:latin typeface="Georgia" pitchFamily="34" charset="0"/>
+                <a:ea typeface="Georgia" pitchFamily="34" charset="-122"/>
+                <a:cs typeface="Georgia" pitchFamily="34" charset="-120"/>
+              </a:rPr>
+              <a:t>Three frameworks, one question.</a:t>
+            </a:r>
+            <a:pPr algn="l" indent="0" marL="0">
+              <a:lnSpc>
+                <a:spcPts val="1620"/>
+              </a:lnSpc>
               <a:spcAft>
                 <a:spcPts val="300"/>
               </a:spcAft>
@@ -3889,30 +4762,7 @@
                 <a:ea typeface="Georgia" pitchFamily="34" charset="-122"/>
                 <a:cs typeface="Georgia" pitchFamily="34" charset="-120"/>
               </a:rPr>
-              <a:t>Open question: </a:t>
-            </a:r>
-            <a:pPr algn="l" indent="0" marL="0">
-              <a:lnSpc>
-                <a:spcPts val="1680"/>
-              </a:lnSpc>
-              <a:spcBef>
-                <a:spcPts val="300"/>
-              </a:spcBef>
-              <a:spcAft>
-                <a:spcPts val="300"/>
-              </a:spcAft>
-              <a:buNone/>
-            </a:pPr>
-            <a:r>
-              <a:rPr lang="en-US" sz="1200" i="1" dirty="0">
-                <a:solidFill>
-                  <a:srgbClr val="1A1A1A"/>
-                </a:solidFill>
-                <a:latin typeface="Georgia" pitchFamily="34" charset="0"/>
-                <a:ea typeface="Georgia" pitchFamily="34" charset="-122"/>
-                <a:cs typeface="Georgia" pitchFamily="34" charset="-120"/>
-              </a:rPr>
-              <a:t>"Is the modern periodic table 'more correct' than Empedocles' four elements? More correct in what way?"</a:t>
+              <a:t> Write on board:</a:t>
             </a:r>
             <a:endParaRPr lang="en-US" sz="1200" dirty="0"/>
           </a:p>
@@ -3926,8 +4776,8 @@
         </p:nvSpPr>
         <p:spPr>
           <a:xfrm>
-            <a:off x="406301" y="1160413"/>
-            <a:ext cx="8498026" cy="426541"/>
+            <a:off x="406301" y="1254323"/>
+            <a:ext cx="8498026" cy="213271"/>
           </a:xfrm>
           <a:prstGeom prst="rect">
             <a:avLst/>
@@ -3952,29 +4802,6 @@
               <a:buNone/>
             </a:pPr>
             <a:r>
-              <a:rPr lang="en-US" sz="1200" dirty="0">
-                <a:solidFill>
-                  <a:srgbClr val="1A1A1A"/>
-                </a:solidFill>
-                <a:latin typeface="Georgia" pitchFamily="34" charset="0"/>
-                <a:ea typeface="Georgia" pitchFamily="34" charset="-122"/>
-                <a:cs typeface="Georgia" pitchFamily="34" charset="-120"/>
-              </a:rPr>
-              <a:t>– Let students argue. – Reinforce: a framework can be more </a:t>
-            </a:r>
-            <a:pPr algn="l" indent="0" marL="0">
-              <a:lnSpc>
-                <a:spcPts val="1680"/>
-              </a:lnSpc>
-              <a:spcBef>
-                <a:spcPts val="300"/>
-              </a:spcBef>
-              <a:spcAft>
-                <a:spcPts val="300"/>
-              </a:spcAft>
-              <a:buNone/>
-            </a:pPr>
-            <a:r>
               <a:rPr lang="en-US" sz="1200" i="1" dirty="0">
                 <a:solidFill>
                   <a:srgbClr val="1A1A1A"/>
@@ -3983,76 +4810,7 @@
                 <a:ea typeface="Georgia" pitchFamily="34" charset="-122"/>
                 <a:cs typeface="Georgia" pitchFamily="34" charset="-120"/>
               </a:rPr>
-              <a:t>predictive</a:t>
-            </a:r>
-            <a:pPr algn="l" indent="0" marL="0">
-              <a:lnSpc>
-                <a:spcPts val="1680"/>
-              </a:lnSpc>
-              <a:spcBef>
-                <a:spcPts val="300"/>
-              </a:spcBef>
-              <a:spcAft>
-                <a:spcPts val="300"/>
-              </a:spcAft>
-              <a:buNone/>
-            </a:pPr>
-            <a:r>
-              <a:rPr lang="en-US" sz="1200" dirty="0">
-                <a:solidFill>
-                  <a:srgbClr val="1A1A1A"/>
-                </a:solidFill>
-                <a:latin typeface="Georgia" pitchFamily="34" charset="0"/>
-                <a:ea typeface="Georgia" pitchFamily="34" charset="-122"/>
-                <a:cs typeface="Georgia" pitchFamily="34" charset="-120"/>
-              </a:rPr>
-              <a:t> (chemistry, atomic structure) without being more </a:t>
-            </a:r>
-            <a:pPr algn="l" indent="0" marL="0">
-              <a:lnSpc>
-                <a:spcPts val="1680"/>
-              </a:lnSpc>
-              <a:spcBef>
-                <a:spcPts val="300"/>
-              </a:spcBef>
-              <a:spcAft>
-                <a:spcPts val="300"/>
-              </a:spcAft>
-              <a:buNone/>
-            </a:pPr>
-            <a:r>
-              <a:rPr lang="en-US" sz="1200" i="1" dirty="0">
-                <a:solidFill>
-                  <a:srgbClr val="1A1A1A"/>
-                </a:solidFill>
-                <a:latin typeface="Georgia" pitchFamily="34" charset="0"/>
-                <a:ea typeface="Georgia" pitchFamily="34" charset="-122"/>
-                <a:cs typeface="Georgia" pitchFamily="34" charset="-120"/>
-              </a:rPr>
-              <a:t>comprehensive</a:t>
-            </a:r>
-            <a:pPr algn="l" indent="0" marL="0">
-              <a:lnSpc>
-                <a:spcPts val="1680"/>
-              </a:lnSpc>
-              <a:spcBef>
-                <a:spcPts val="300"/>
-              </a:spcBef>
-              <a:spcAft>
-                <a:spcPts val="300"/>
-              </a:spcAft>
-              <a:buNone/>
-            </a:pPr>
-            <a:r>
-              <a:rPr lang="en-US" sz="1200" dirty="0">
-                <a:solidFill>
-                  <a:srgbClr val="1A1A1A"/>
-                </a:solidFill>
-                <a:latin typeface="Georgia" pitchFamily="34" charset="0"/>
-                <a:ea typeface="Georgia" pitchFamily="34" charset="-122"/>
-                <a:cs typeface="Georgia" pitchFamily="34" charset="-120"/>
-              </a:rPr>
-              <a:t> (the Sāṅkhya scheme includes consciousness; modern chemistry doesn't claim to).</a:t>
+              <a:t>Each row: Framework · Approximate date · Categories.</a:t>
             </a:r>
             <a:endParaRPr lang="en-US" sz="1200" dirty="0"/>
           </a:p>
@@ -4210,7 +4968,7 @@
                 <a:ea typeface="Times New Roman" pitchFamily="34" charset="-122"/>
                 <a:cs typeface="Times New Roman" pitchFamily="34" charset="-120"/>
               </a:rPr>
-              <a:t>Wrap-up (5 min)</a:t>
+              <a:t>Core (25 min) (cont.)</a:t>
             </a:r>
             <a:endParaRPr lang="en-US" sz="1800" dirty="0"/>
           </a:p>
@@ -4224,8 +4982,8 @@
         </p:nvSpPr>
         <p:spPr>
           <a:xfrm>
-            <a:off x="406301" y="870942"/>
-            <a:ext cx="8498026" cy="426541"/>
+            <a:off x="634901" y="883593"/>
+            <a:ext cx="8102798" cy="769441"/>
           </a:xfrm>
           <a:prstGeom prst="rect">
             <a:avLst/>
@@ -4237,13 +4995,31 @@
           <a:bodyPr wrap="square" lIns="0" tIns="0" rIns="0" bIns="0" rtlCol="0" anchor="t"/>
           <a:lstStyle/>
           <a:p>
-            <a:pPr algn="l" indent="0" marL="0">
-              <a:lnSpc>
-                <a:spcPts val="1680"/>
-              </a:lnSpc>
-              <a:spcBef>
-                <a:spcPts val="300"/>
-              </a:spcBef>
+            <a:pPr algn="l" marL="342900" indent="-342900">
+              <a:lnSpc>
+                <a:spcPts val="1620"/>
+              </a:lnSpc>
+              <a:spcAft>
+                <a:spcPts val="300"/>
+              </a:spcAft>
+              <a:buSzPct val="100000"/>
+              <a:buChar char="•"/>
+            </a:pPr>
+            <a:r>
+              <a:rPr lang="en-US" sz="1200" b="1" dirty="0">
+                <a:solidFill>
+                  <a:srgbClr val="1A1A1A"/>
+                </a:solidFill>
+                <a:latin typeface="Georgia" pitchFamily="34" charset="0"/>
+                <a:ea typeface="Georgia" pitchFamily="34" charset="-122"/>
+                <a:cs typeface="Georgia" pitchFamily="34" charset="-120"/>
+              </a:rPr>
+              <a:t>Greek (Empedocles, Aristotle)</a:t>
+            </a:r>
+            <a:pPr algn="l" indent="0" marL="0">
+              <a:lnSpc>
+                <a:spcPts val="1620"/>
+              </a:lnSpc>
               <a:spcAft>
                 <a:spcPts val="300"/>
               </a:spcAft>
@@ -4258,38 +5034,36 @@
                 <a:ea typeface="Georgia" pitchFamily="34" charset="-122"/>
                 <a:cs typeface="Georgia" pitchFamily="34" charset="-120"/>
               </a:rPr>
-              <a:t>– Preview Day 2: </a:t>
-            </a:r>
-            <a:pPr algn="l" indent="0" marL="0">
-              <a:lnSpc>
-                <a:spcPts val="1680"/>
-              </a:lnSpc>
-              <a:spcBef>
-                <a:spcPts val="300"/>
-              </a:spcBef>
-              <a:spcAft>
-                <a:spcPts val="300"/>
-              </a:spcAft>
-              <a:buNone/>
-            </a:pPr>
-            <a:r>
-              <a:rPr lang="en-US" sz="1200" i="1" dirty="0">
-                <a:solidFill>
-                  <a:srgbClr val="1A1A1A"/>
-                </a:solidFill>
-                <a:latin typeface="Georgia" pitchFamily="34" charset="0"/>
-                <a:ea typeface="Georgia" pitchFamily="34" charset="-122"/>
-                <a:cs typeface="Georgia" pitchFamily="34" charset="-120"/>
-              </a:rPr>
-              <a:t>"Tomorrow we map out the full 25-tattva ladder of Sāṅkhya. The five elements are only the LAST five."</a:t>
-            </a:r>
-            <a:pPr algn="l" indent="0" marL="0">
-              <a:lnSpc>
-                <a:spcPts val="1680"/>
-              </a:lnSpc>
-              <a:spcBef>
-                <a:spcPts val="300"/>
-              </a:spcBef>
+              <a:t> — 5th c. BCE → 4th c. BCE · 4 + 1 (quintessence)</a:t>
+            </a:r>
+            <a:endParaRPr lang="en-US" sz="1200" dirty="0"/>
+          </a:p>
+          <a:p>
+            <a:pPr algn="l" marL="342900" indent="-342900">
+              <a:lnSpc>
+                <a:spcPts val="1620"/>
+              </a:lnSpc>
+              <a:spcAft>
+                <a:spcPts val="300"/>
+              </a:spcAft>
+              <a:buSzPct val="100000"/>
+              <a:buChar char="•"/>
+            </a:pPr>
+            <a:r>
+              <a:rPr lang="en-US" sz="1200" b="1" dirty="0">
+                <a:solidFill>
+                  <a:srgbClr val="1A1A1A"/>
+                </a:solidFill>
+                <a:latin typeface="Georgia" pitchFamily="34" charset="0"/>
+                <a:ea typeface="Georgia" pitchFamily="34" charset="-122"/>
+                <a:cs typeface="Georgia" pitchFamily="34" charset="-120"/>
+              </a:rPr>
+              <a:t>Sāṅkhya (India)</a:t>
+            </a:r>
+            <a:pPr algn="l" indent="0" marL="0">
+              <a:lnSpc>
+                <a:spcPts val="1620"/>
+              </a:lnSpc>
               <a:spcAft>
                 <a:spcPts val="300"/>
               </a:spcAft>
@@ -4304,7 +5078,51 @@
                 <a:ea typeface="Georgia" pitchFamily="34" charset="-122"/>
                 <a:cs typeface="Georgia" pitchFamily="34" charset="-120"/>
               </a:rPr>
-              <a:t> – Homework: read the SB 2.10.3 cache entry in full. Note one question you have.</a:t>
+              <a:t> — likely pre-5th c. BCE, codified c. 4th c. CE · 25 tattvas (5 are bhūtas)</a:t>
+            </a:r>
+            <a:endParaRPr lang="en-US" sz="1200" dirty="0"/>
+          </a:p>
+          <a:p>
+            <a:pPr algn="l" marL="342900" indent="-342900">
+              <a:lnSpc>
+                <a:spcPts val="1620"/>
+              </a:lnSpc>
+              <a:spcAft>
+                <a:spcPts val="300"/>
+              </a:spcAft>
+              <a:buSzPct val="100000"/>
+              <a:buChar char="•"/>
+            </a:pPr>
+            <a:r>
+              <a:rPr lang="en-US" sz="1200" b="1" dirty="0">
+                <a:solidFill>
+                  <a:srgbClr val="1A1A1A"/>
+                </a:solidFill>
+                <a:latin typeface="Georgia" pitchFamily="34" charset="0"/>
+                <a:ea typeface="Georgia" pitchFamily="34" charset="-122"/>
+                <a:cs typeface="Georgia" pitchFamily="34" charset="-120"/>
+              </a:rPr>
+              <a:t>Modern periodic table</a:t>
+            </a:r>
+            <a:pPr algn="l" indent="0" marL="0">
+              <a:lnSpc>
+                <a:spcPts val="1620"/>
+              </a:lnSpc>
+              <a:spcAft>
+                <a:spcPts val="300"/>
+              </a:spcAft>
+              <a:buNone/>
+            </a:pPr>
+            <a:r>
+              <a:rPr lang="en-US" sz="1200" dirty="0">
+                <a:solidFill>
+                  <a:srgbClr val="1A1A1A"/>
+                </a:solidFill>
+                <a:latin typeface="Georgia" pitchFamily="34" charset="0"/>
+                <a:ea typeface="Georgia" pitchFamily="34" charset="-122"/>
+                <a:cs typeface="Georgia" pitchFamily="34" charset="-120"/>
+              </a:rPr>
+              <a:t> — 1869 (Mendeleev) → present · 118+ elements</a:t>
             </a:r>
             <a:endParaRPr lang="en-US" sz="1200" dirty="0"/>
           </a:p>
@@ -4462,7 +5280,7 @@
                 <a:ea typeface="Times New Roman" pitchFamily="34" charset="-122"/>
                 <a:cs typeface="Times New Roman" pitchFamily="34" charset="-120"/>
               </a:rPr>
-              <a:t>Differentiation</a:t>
+              <a:t>Core (25 min) (cont.)</a:t>
             </a:r>
             <a:endParaRPr lang="en-US" sz="1800" dirty="0"/>
           </a:p>
@@ -4477,7 +5295,7 @@
         <p:spPr>
           <a:xfrm>
             <a:off x="634901" y="883593"/>
-            <a:ext cx="8102798" cy="525661"/>
+            <a:ext cx="8102798" cy="693241"/>
           </a:xfrm>
           <a:prstGeom prst="rect">
             <a:avLst/>
@@ -4508,7 +5326,7 @@
                 <a:ea typeface="Georgia" pitchFamily="34" charset="-122"/>
                 <a:cs typeface="Georgia" pitchFamily="34" charset="-120"/>
               </a:rPr>
-              <a:t>Tier up:</a:t>
+              <a:t>The persistent question:</a:t>
             </a:r>
             <a:pPr algn="l" indent="0" marL="0">
               <a:lnSpc>
@@ -4528,10 +5346,72 @@
                 <a:ea typeface="Georgia" pitchFamily="34" charset="-122"/>
                 <a:cs typeface="Georgia" pitchFamily="34" charset="-120"/>
               </a:rPr>
-              <a:t> Read Kirk, Raven &amp; Schofield's intro on Empedocles. Be ready to present on Day 4.</a:t>
+              <a:t> </a:t>
+            </a:r>
+            <a:pPr algn="l" indent="0" marL="0">
+              <a:lnSpc>
+                <a:spcPts val="1620"/>
+              </a:lnSpc>
+              <a:spcAft>
+                <a:spcPts val="300"/>
+              </a:spcAft>
+              <a:buNone/>
+            </a:pPr>
+            <a:r>
+              <a:rPr lang="en-US" sz="1200" i="1" dirty="0">
+                <a:solidFill>
+                  <a:srgbClr val="1A1A1A"/>
+                </a:solidFill>
+                <a:latin typeface="Georgia" pitchFamily="34" charset="0"/>
+                <a:ea typeface="Georgia" pitchFamily="34" charset="-122"/>
+                <a:cs typeface="Georgia" pitchFamily="34" charset="-120"/>
+              </a:rPr>
+              <a:t>"What categories of stuff (and not-stuff) does the world come in?"</a:t>
+            </a:r>
+            <a:pPr algn="l" indent="0" marL="0">
+              <a:lnSpc>
+                <a:spcPts val="1620"/>
+              </a:lnSpc>
+              <a:spcAft>
+                <a:spcPts val="300"/>
+              </a:spcAft>
+              <a:buNone/>
+            </a:pPr>
+            <a:r>
+              <a:rPr lang="en-US" sz="1200" dirty="0">
+                <a:solidFill>
+                  <a:srgbClr val="1A1A1A"/>
+                </a:solidFill>
+                <a:latin typeface="Georgia" pitchFamily="34" charset="0"/>
+                <a:ea typeface="Georgia" pitchFamily="34" charset="-122"/>
+                <a:cs typeface="Georgia" pitchFamily="34" charset="-120"/>
+              </a:rPr>
+              <a:t> Every culture's natural philosophers tried to answer this. The answers differ because the methods differ and the questions are framed differently.</a:t>
             </a:r>
             <a:endParaRPr lang="en-US" sz="1200" dirty="0"/>
           </a:p>
+        </p:txBody>
+      </p:sp>
+      <p:sp>
+        <p:nvSpPr>
+          <p:cNvPr id="5" name="Text 3"/>
+          <p:cNvSpPr/>
+          <p:nvPr/>
+        </p:nvSpPr>
+        <p:spPr>
+          <a:xfrm>
+            <a:off x="634901" y="1678335"/>
+            <a:ext cx="8102798" cy="281880"/>
+          </a:xfrm>
+          <a:prstGeom prst="rect">
+            <a:avLst/>
+          </a:prstGeom>
+          <a:noFill/>
+          <a:ln/>
+        </p:spPr>
+        <p:txBody>
+          <a:bodyPr wrap="square" lIns="0" tIns="0" rIns="0" bIns="0" rtlCol="0" anchor="t"/>
+          <a:lstStyle/>
           <a:p>
             <a:pPr algn="l" marL="342900" indent="-342900">
               <a:lnSpc>
@@ -4552,7 +5432,7 @@
                 <a:ea typeface="Georgia" pitchFamily="34" charset="-122"/>
                 <a:cs typeface="Georgia" pitchFamily="34" charset="-120"/>
               </a:rPr>
-              <a:t>Tier down:</a:t>
+              <a:t>Today's anchor verse — SB 2.10.3.</a:t>
             </a:r>
             <a:pPr algn="l" indent="0" marL="0">
               <a:lnSpc>
@@ -4572,7 +5452,7 @@
                 <a:ea typeface="Georgia" pitchFamily="34" charset="-122"/>
                 <a:cs typeface="Georgia" pitchFamily="34" charset="-120"/>
               </a:rPr>
-              <a:t> Stick to the framework-comparison; the primary-source reading deepens on Day 5.</a:t>
+              <a:t> Read in IAST. Then translation:</a:t>
             </a:r>
             <a:endParaRPr lang="en-US" sz="1200" dirty="0"/>
           </a:p>
@@ -4580,7 +5460,200 @@
       </p:sp>
       <p:sp>
         <p:nvSpPr>
-          <p:cNvPr id="5" name="Text 3"/>
+          <p:cNvPr id="6" name="Text 4"/>
+          <p:cNvSpPr/>
+          <p:nvPr/>
+        </p:nvSpPr>
+        <p:spPr>
+          <a:xfrm>
+            <a:off x="406301" y="2061716"/>
+            <a:ext cx="8331398" cy="842963"/>
+          </a:xfrm>
+          <a:prstGeom prst="rect">
+            <a:avLst/>
+          </a:prstGeom>
+          <a:solidFill>
+            <a:srgbClr val="FFFFFF"/>
+          </a:solidFill>
+          <a:ln/>
+        </p:spPr>
+        <p:txBody>
+          <a:bodyPr wrap="square" rtlCol="0" anchor="ctr"/>
+          <a:lstStyle/>
+          <a:p>
+            <a:pPr indent="0" marL="0">
+              <a:buNone/>
+            </a:pPr>
+            <a:endParaRPr lang="en-US" dirty="0"/>
+          </a:p>
+        </p:txBody>
+      </p:sp>
+      <p:sp>
+        <p:nvSpPr>
+          <p:cNvPr id="7" name="Shape 5"/>
+          <p:cNvSpPr/>
+          <p:nvPr/>
+        </p:nvSpPr>
+        <p:spPr>
+          <a:xfrm>
+            <a:off x="434876" y="2061716"/>
+            <a:ext cx="0" cy="842963"/>
+          </a:xfrm>
+          <a:prstGeom prst="line">
+            <a:avLst/>
+          </a:prstGeom>
+          <a:noFill/>
+          <a:ln w="57150">
+            <a:solidFill>
+              <a:srgbClr val="997929"/>
+            </a:solidFill>
+            <a:prstDash val="solid"/>
+          </a:ln>
+        </p:spPr>
+      </p:sp>
+      <p:sp>
+        <p:nvSpPr>
+          <p:cNvPr id="8" name="Text 6"/>
+          <p:cNvSpPr/>
+          <p:nvPr/>
+        </p:nvSpPr>
+        <p:spPr>
+          <a:xfrm>
+            <a:off x="692051" y="2252216"/>
+            <a:ext cx="7973389" cy="461963"/>
+          </a:xfrm>
+          <a:prstGeom prst="rect">
+            <a:avLst/>
+          </a:prstGeom>
+          <a:noFill/>
+          <a:ln/>
+        </p:spPr>
+        <p:txBody>
+          <a:bodyPr wrap="square" lIns="0" tIns="0" rIns="0" bIns="0" rtlCol="0" anchor="t"/>
+          <a:lstStyle/>
+          <a:p>
+            <a:pPr algn="l" indent="0" marL="0">
+              <a:lnSpc>
+                <a:spcPts val="1820"/>
+              </a:lnSpc>
+              <a:spcBef>
+                <a:spcPts val="300"/>
+              </a:spcBef>
+              <a:spcAft>
+                <a:spcPts val="300"/>
+              </a:spcAft>
+              <a:buNone/>
+            </a:pPr>
+            <a:r>
+              <a:rPr lang="en-US" sz="1300" dirty="0">
+                <a:solidFill>
+                  <a:srgbClr val="1A1A1A"/>
+                </a:solidFill>
+                <a:latin typeface="Times New Roman" pitchFamily="34" charset="0"/>
+                <a:ea typeface="Times New Roman" pitchFamily="34" charset="-122"/>
+                <a:cs typeface="Times New Roman" pitchFamily="34" charset="-120"/>
+              </a:rPr>
+              <a:t>"</a:t>
+            </a:r>
+            <a:pPr algn="l" indent="0" marL="0">
+              <a:lnSpc>
+                <a:spcPts val="1820"/>
+              </a:lnSpc>
+              <a:spcBef>
+                <a:spcPts val="300"/>
+              </a:spcBef>
+              <a:spcAft>
+                <a:spcPts val="300"/>
+              </a:spcAft>
+              <a:buNone/>
+            </a:pPr>
+            <a:r>
+              <a:rPr lang="en-US" sz="1300" i="1" dirty="0">
+                <a:solidFill>
+                  <a:srgbClr val="1A1A1A"/>
+                </a:solidFill>
+                <a:latin typeface="Times New Roman" pitchFamily="34" charset="0"/>
+                <a:ea typeface="Times New Roman" pitchFamily="34" charset="-122"/>
+                <a:cs typeface="Times New Roman" pitchFamily="34" charset="-120"/>
+              </a:rPr>
+              <a:t>bhūta-mātrendṛya-dhiyāṁ janma sarga udāhṛtaḥ ...</a:t>
+            </a:r>
+            <a:pPr algn="l" indent="0" marL="0">
+              <a:lnSpc>
+                <a:spcPts val="1820"/>
+              </a:lnSpc>
+              <a:spcBef>
+                <a:spcPts val="300"/>
+              </a:spcBef>
+              <a:spcAft>
+                <a:spcPts val="300"/>
+              </a:spcAft>
+              <a:buNone/>
+            </a:pPr>
+            <a:r>
+              <a:rPr lang="en-US" sz="1300" dirty="0">
+                <a:solidFill>
+                  <a:srgbClr val="1A1A1A"/>
+                </a:solidFill>
+                <a:latin typeface="Times New Roman" pitchFamily="34" charset="0"/>
+                <a:ea typeface="Times New Roman" pitchFamily="34" charset="-122"/>
+                <a:cs typeface="Times New Roman" pitchFamily="34" charset="-120"/>
+              </a:rPr>
+              <a:t>" "The manifestation of the gross elements, the senses, and the intellect is called creation (</a:t>
+            </a:r>
+            <a:pPr algn="l" indent="0" marL="0">
+              <a:lnSpc>
+                <a:spcPts val="1820"/>
+              </a:lnSpc>
+              <a:spcBef>
+                <a:spcPts val="300"/>
+              </a:spcBef>
+              <a:spcAft>
+                <a:spcPts val="300"/>
+              </a:spcAft>
+              <a:buNone/>
+            </a:pPr>
+            <a:r>
+              <a:rPr lang="en-US" sz="1300" i="1" dirty="0">
+                <a:solidFill>
+                  <a:srgbClr val="1A1A1A"/>
+                </a:solidFill>
+                <a:latin typeface="Times New Roman" pitchFamily="34" charset="0"/>
+                <a:ea typeface="Times New Roman" pitchFamily="34" charset="-122"/>
+                <a:cs typeface="Times New Roman" pitchFamily="34" charset="-120"/>
+              </a:rPr>
+              <a:t>sarga</a:t>
+            </a:r>
+            <a:pPr algn="l" indent="0" marL="0">
+              <a:lnSpc>
+                <a:spcPts val="1820"/>
+              </a:lnSpc>
+              <a:spcBef>
+                <a:spcPts val="300"/>
+              </a:spcBef>
+              <a:spcAft>
+                <a:spcPts val="300"/>
+              </a:spcAft>
+              <a:buNone/>
+            </a:pPr>
+            <a:r>
+              <a:rPr lang="en-US" sz="1300" dirty="0">
+                <a:solidFill>
+                  <a:srgbClr val="1A1A1A"/>
+                </a:solidFill>
+                <a:latin typeface="Times New Roman" pitchFamily="34" charset="0"/>
+                <a:ea typeface="Times New Roman" pitchFamily="34" charset="-122"/>
+                <a:cs typeface="Times New Roman" pitchFamily="34" charset="-120"/>
+              </a:rPr>
+              <a:t>)."</a:t>
+            </a:r>
+            <a:endParaRPr lang="en-US" sz="1300" dirty="0"/>
+          </a:p>
+        </p:txBody>
+      </p:sp>
+      <p:sp>
+        <p:nvSpPr>
+          <p:cNvPr id="9" name="Text 7"/>
           <p:cNvSpPr/>
           <p:nvPr/>
         </p:nvSpPr>
@@ -4730,7 +5803,7 @@
                 <a:ea typeface="Times New Roman" pitchFamily="34" charset="-122"/>
                 <a:cs typeface="Times New Roman" pitchFamily="34" charset="-120"/>
               </a:rPr>
-              <a:t>Teacher notes</a:t>
+              <a:t>Core (25 min) (cont.)</a:t>
             </a:r>
             <a:endParaRPr lang="en-US" sz="1800" dirty="0"/>
           </a:p>
@@ -4770,6 +5843,29 @@
               <a:buNone/>
             </a:pPr>
             <a:r>
+              <a:rPr lang="en-US" sz="1200" b="1" dirty="0">
+                <a:solidFill>
+                  <a:srgbClr val="1A1A1A"/>
+                </a:solidFill>
+                <a:latin typeface="Georgia" pitchFamily="34" charset="0"/>
+                <a:ea typeface="Georgia" pitchFamily="34" charset="-122"/>
+                <a:cs typeface="Georgia" pitchFamily="34" charset="-120"/>
+              </a:rPr>
+              <a:t>Note the move:</a:t>
+            </a:r>
+            <a:pPr algn="l" indent="0" marL="0">
+              <a:lnSpc>
+                <a:spcPts val="1680"/>
+              </a:lnSpc>
+              <a:spcBef>
+                <a:spcPts val="300"/>
+              </a:spcBef>
+              <a:spcAft>
+                <a:spcPts val="300"/>
+              </a:spcAft>
+              <a:buNone/>
+            </a:pPr>
+            <a:r>
               <a:rPr lang="en-US" sz="1200" dirty="0">
                 <a:solidFill>
                   <a:srgbClr val="1A1A1A"/>
@@ -4778,7 +5874,7 @@
                 <a:ea typeface="Georgia" pitchFamily="34" charset="-122"/>
                 <a:cs typeface="Georgia" pitchFamily="34" charset="-120"/>
               </a:rPr>
-              <a:t>– Don't let "modern science is just objectively right" be the resting position. Push: "what does objectively right </a:t>
+              <a:t> the Sāṅkhya verse names the bhūtas (elements), the indriyas (senses), and the dhī (intellect) as products of a single creation event. Modern science talks about atoms; Sāṅkhya talks about a unified scheme that includes the </a:t>
             </a:r>
             <a:pPr algn="l" indent="0" marL="0">
               <a:lnSpc>
@@ -4801,7 +5897,7 @@
                 <a:ea typeface="Georgia" pitchFamily="34" charset="-122"/>
                 <a:cs typeface="Georgia" pitchFamily="34" charset="-120"/>
               </a:rPr>
-              <a:t>mean</a:t>
+              <a:t>perceiver</a:t>
             </a:r>
             <a:pPr algn="l" indent="0" marL="0">
               <a:lnSpc>
@@ -4824,53 +5920,7 @@
                 <a:ea typeface="Georgia" pitchFamily="34" charset="-122"/>
                 <a:cs typeface="Georgia" pitchFamily="34" charset="-120"/>
               </a:rPr>
-              <a:t>? Predictive accuracy? Comprehensiveness? Explanatory power?" – This module is about </a:t>
-            </a:r>
-            <a:pPr algn="l" indent="0" marL="0">
-              <a:lnSpc>
-                <a:spcPts val="1680"/>
-              </a:lnSpc>
-              <a:spcBef>
-                <a:spcPts val="300"/>
-              </a:spcBef>
-              <a:spcAft>
-                <a:spcPts val="300"/>
-              </a:spcAft>
-              <a:buNone/>
-            </a:pPr>
-            <a:r>
-              <a:rPr lang="en-US" sz="1200" i="1" dirty="0">
-                <a:solidFill>
-                  <a:srgbClr val="1A1A1A"/>
-                </a:solidFill>
-                <a:latin typeface="Georgia" pitchFamily="34" charset="0"/>
-                <a:ea typeface="Georgia" pitchFamily="34" charset="-122"/>
-                <a:cs typeface="Georgia" pitchFamily="34" charset="-120"/>
-              </a:rPr>
-              <a:t>intellectual honesty across frameworks</a:t>
-            </a:r>
-            <a:pPr algn="l" indent="0" marL="0">
-              <a:lnSpc>
-                <a:spcPts val="1680"/>
-              </a:lnSpc>
-              <a:spcBef>
-                <a:spcPts val="300"/>
-              </a:spcBef>
-              <a:spcAft>
-                <a:spcPts val="300"/>
-              </a:spcAft>
-              <a:buNone/>
-            </a:pPr>
-            <a:r>
-              <a:rPr lang="en-US" sz="1200" dirty="0">
-                <a:solidFill>
-                  <a:srgbClr val="1A1A1A"/>
-                </a:solidFill>
-                <a:latin typeface="Georgia" pitchFamily="34" charset="0"/>
-                <a:ea typeface="Georgia" pitchFamily="34" charset="-122"/>
-                <a:cs typeface="Georgia" pitchFamily="34" charset="-120"/>
-              </a:rPr>
-              <a:t>, not about advocacy for any one of them.</a:t>
+              <a:t>. This is a real structural difference, not just terminology.</a:t>
             </a:r>
             <a:endParaRPr lang="en-US" sz="1200" dirty="0"/>
           </a:p>
